--- a/courses/learn_floorplanning/module03-03-soft-module-sizing/slides.pptx
+++ b/courses/learn_floorplanning/module03-03-soft-module-sizing/slides.pptx
@@ -11,6 +11,10 @@
     <p:sldId id="259" r:id="rId11"/>
     <p:sldId id="260" r:id="rId12"/>
     <p:sldId id="261" r:id="rId13"/>
+    <p:sldId id="262" r:id="rId14"/>
+    <p:sldId id="263" r:id="rId15"/>
+    <p:sldId id="264" r:id="rId16"/>
+    <p:sldId id="265" r:id="rId17"/>
   </p:sldIdLst>
   <p:sldSz cx="12191695" cy="6858000" type="screen4x3"/>
   <p:notesSz cx="6858000" cy="9144000"/>
@@ -507,7 +511,83 @@
           <a:lstStyle/>
           <a:p>
             <a:r>
-              <a:t>Hard modules have fixed width and height. Soft modules keep a fixed area but may change aspect ratio within bounds—minimum and maximum width over height. Floorplanning often sizes soft blocks while packing so the outline fills with less deadspace.</a:t>
+              <a:t>Soft module A keeps area six but may reshape between aspect one half and two. Reshape three by two into two by three, then pack legally—still area six.</a:t>
+            </a:r>
+          </a:p>
+          <a:p/>
+          <a:p>
+            <a:r>
+              <a:t>&lt;!-- algorithm-walkthrough --&gt;</a:t>
+            </a:r>
+          </a:p>
+        </p:txBody>
+      </p:sp>
+      <p:sp>
+        <p:nvSpPr>
+          <p:cNvPr id="4" name="Slide Number Placeholder 3"/>
+          <p:cNvSpPr>
+            <a:spLocks noGrp="1"/>
+          </p:cNvSpPr>
+          <p:nvPr>
+            <p:ph type="sldNum" idx="5" sz="quarter"/>
+          </p:nvPr>
+        </p:nvSpPr>
+        <p:spPr/>
+      </p:sp>
+    </p:spTree>
+  </p:cSld>
+  <p:clrMapOvr>
+    <a:masterClrMapping/>
+  </p:clrMapOvr>
+</p:notes>
+</file>
+
+<file path=ppt/notesSlides/notesSlide10.xml><?xml version="1.0" encoding="utf-8"?>
+<p:notes xmlns:a="http://schemas.openxmlformats.org/drawingml/2006/main" xmlns:p="http://schemas.openxmlformats.org/presentationml/2006/main" xmlns:r="http://schemas.openxmlformats.org/officeDocument/2006/relationships">
+  <p:cSld>
+    <p:spTree>
+      <p:nvGrpSpPr>
+        <p:cNvPr id="1" name=""/>
+        <p:cNvGrpSpPr/>
+        <p:nvPr/>
+      </p:nvGrpSpPr>
+      <p:grpSpPr>
+        <a:xfrm>
+          <a:off x="0" y="0"/>
+          <a:ext cx="0" cy="0"/>
+          <a:chOff x="0" y="0"/>
+          <a:chExt cx="0" cy="0"/>
+        </a:xfrm>
+      </p:grpSpPr>
+      <p:sp>
+        <p:nvSpPr>
+          <p:cNvPr id="2" name="Slide Image Placeholder 1"/>
+          <p:cNvSpPr>
+            <a:spLocks noGrp="1"/>
+          </p:cNvSpPr>
+          <p:nvPr>
+            <p:ph type="sldImg" idx="2"/>
+          </p:nvPr>
+        </p:nvSpPr>
+        <p:spPr/>
+      </p:sp>
+      <p:sp>
+        <p:nvSpPr>
+          <p:cNvPr id="3" name="Notes Placeholder 2"/>
+          <p:cNvSpPr>
+            <a:spLocks noGrp="1"/>
+          </p:cNvSpPr>
+          <p:nvPr>
+            <p:ph type="body" idx="3" sz="quarter"/>
+          </p:nvPr>
+        </p:nvSpPr>
+        <p:spPr/>
+        <p:txBody>
+          <a:bodyPr/>
+          <a:lstStyle/>
+          <a:p>
+            <a:r>
+              <a:t>Accept a legal soft packing with A at two by three. Next: fix macro D at the origin.</a:t>
             </a:r>
           </a:p>
         </p:txBody>
@@ -577,7 +657,7 @@
           <a:lstStyle/>
           <a:p>
             <a:r>
-              <a:t>For soft module A with area a, choose width w and set height to a over w, subject to aspect_min ≤ w/h ≤ aspect_max. Re-pack after each sizing move. On our starter, A is soft; B through E stay hard. Deadspace uses the same formula: outline area minus sum of areas—areas stay constant if only aspect changes.</a:t>
+              <a:t>Module A is soft: area stays six, but aspect can move between one half and two. Hard modules B through E keep fixed shapes.</a:t>
             </a:r>
           </a:p>
         </p:txBody>
@@ -647,7 +727,7 @@
           <a:lstStyle/>
           <a:p>
             <a:r>
-              <a:t>Open **soft-module-sizing**. Select module A, drag aspect within bounds, and watch the packing reshape under the fixed outline. Confirm area of A stays constant while density of the packing geometry changes. Then implement aspect moves in Track A.</a:t>
+              <a:t>Reshape soft A to two by three—still area six. The soft packing moves neighbors so the outline stay legal.</a:t>
             </a:r>
           </a:p>
         </p:txBody>
@@ -717,7 +797,7 @@
           <a:lstStyle/>
           <a:p>
             <a:r>
-              <a:t>Extend your packer so A’s (w, h) can vary under aspect constraints at constant area. Combine with a simple search—even greedy aspect tries help. Report legality and deadspace before and after. Reject sizes outside aspect bounds.</a:t>
+              <a:t>After reshape, the soft packing remains legal inside ten by eight. Softness is not a license to overflow—legality still gates acceptance.</a:t>
             </a:r>
           </a:p>
         </p:txBody>
@@ -787,7 +867,7 @@
           <a:lstStyle/>
           <a:p>
             <a:r>
-              <a:t>Using aspect limits on w/h but updating only w without fixing h = area/w breaks the area invariant. Allowing zero width is nonsense—enforce positive sizes. Soft sizing cannot fix an area budget that already exceeds the outline.</a:t>
+              <a:t>Compare the hard three-by-two golden with the soft two-by-three packing. Same area budget for A; different whitespace shape.</a:t>
             </a:r>
           </a:p>
         </p:txBody>
@@ -857,7 +937,223 @@
           <a:lstStyle/>
           <a:p>
             <a:r>
-              <a:t>Improve a legal packing by resizing A within bounds. Next: hard macros that refuse to move or resize.</a:t>
+              <a:t>Soft modules trade aspect for packing quality under area and aspect bounds. Always re-check legality after a resize.</a:t>
+            </a:r>
+          </a:p>
+          <a:p/>
+          <a:p>
+            <a:r>
+              <a:t>&lt;!-- /algorithm-walkthrough --&gt;</a:t>
+            </a:r>
+          </a:p>
+        </p:txBody>
+      </p:sp>
+      <p:sp>
+        <p:nvSpPr>
+          <p:cNvPr id="4" name="Slide Number Placeholder 3"/>
+          <p:cNvSpPr>
+            <a:spLocks noGrp="1"/>
+          </p:cNvSpPr>
+          <p:nvPr>
+            <p:ph type="sldNum" idx="5" sz="quarter"/>
+          </p:nvPr>
+        </p:nvSpPr>
+        <p:spPr/>
+      </p:sp>
+    </p:spTree>
+  </p:cSld>
+  <p:clrMapOvr>
+    <a:masterClrMapping/>
+  </p:clrMapOvr>
+</p:notes>
+</file>
+
+<file path=ppt/notesSlides/notesSlide7.xml><?xml version="1.0" encoding="utf-8"?>
+<p:notes xmlns:a="http://schemas.openxmlformats.org/drawingml/2006/main" xmlns:p="http://schemas.openxmlformats.org/presentationml/2006/main" xmlns:r="http://schemas.openxmlformats.org/officeDocument/2006/relationships">
+  <p:cSld>
+    <p:spTree>
+      <p:nvGrpSpPr>
+        <p:cNvPr id="1" name=""/>
+        <p:cNvGrpSpPr/>
+        <p:nvPr/>
+      </p:nvGrpSpPr>
+      <p:grpSpPr>
+        <a:xfrm>
+          <a:off x="0" y="0"/>
+          <a:ext cx="0" cy="0"/>
+          <a:chOff x="0" y="0"/>
+          <a:chExt cx="0" cy="0"/>
+        </a:xfrm>
+      </p:grpSpPr>
+      <p:sp>
+        <p:nvSpPr>
+          <p:cNvPr id="2" name="Slide Image Placeholder 1"/>
+          <p:cNvSpPr>
+            <a:spLocks noGrp="1"/>
+          </p:cNvSpPr>
+          <p:nvPr>
+            <p:ph type="sldImg" idx="2"/>
+          </p:nvPr>
+        </p:nvSpPr>
+        <p:spPr/>
+      </p:sp>
+      <p:sp>
+        <p:nvSpPr>
+          <p:cNvPr id="3" name="Notes Placeholder 2"/>
+          <p:cNvSpPr>
+            <a:spLocks noGrp="1"/>
+          </p:cNvSpPr>
+          <p:nvPr>
+            <p:ph type="body" idx="3" sz="quarter"/>
+          </p:nvPr>
+        </p:nvSpPr>
+        <p:spPr/>
+        <p:txBody>
+          <a:bodyPr/>
+          <a:lstStyle/>
+          <a:p>
+            <a:r>
+              <a:t>Open soft-module-sizing. Show hard three-by-two, then Reshape A to two by three. Confirm area six and legality true on the soft packing.</a:t>
+            </a:r>
+          </a:p>
+        </p:txBody>
+      </p:sp>
+      <p:sp>
+        <p:nvSpPr>
+          <p:cNvPr id="4" name="Slide Number Placeholder 3"/>
+          <p:cNvSpPr>
+            <a:spLocks noGrp="1"/>
+          </p:cNvSpPr>
+          <p:nvPr>
+            <p:ph type="sldNum" idx="5" sz="quarter"/>
+          </p:nvPr>
+        </p:nvSpPr>
+        <p:spPr/>
+      </p:sp>
+    </p:spTree>
+  </p:cSld>
+  <p:clrMapOvr>
+    <a:masterClrMapping/>
+  </p:clrMapOvr>
+</p:notes>
+</file>
+
+<file path=ppt/notesSlides/notesSlide8.xml><?xml version="1.0" encoding="utf-8"?>
+<p:notes xmlns:a="http://schemas.openxmlformats.org/drawingml/2006/main" xmlns:p="http://schemas.openxmlformats.org/presentationml/2006/main" xmlns:r="http://schemas.openxmlformats.org/officeDocument/2006/relationships">
+  <p:cSld>
+    <p:spTree>
+      <p:nvGrpSpPr>
+        <p:cNvPr id="1" name=""/>
+        <p:cNvGrpSpPr/>
+        <p:nvPr/>
+      </p:nvGrpSpPr>
+      <p:grpSpPr>
+        <a:xfrm>
+          <a:off x="0" y="0"/>
+          <a:ext cx="0" cy="0"/>
+          <a:chOff x="0" y="0"/>
+          <a:chExt cx="0" cy="0"/>
+        </a:xfrm>
+      </p:grpSpPr>
+      <p:sp>
+        <p:nvSpPr>
+          <p:cNvPr id="2" name="Slide Image Placeholder 1"/>
+          <p:cNvSpPr>
+            <a:spLocks noGrp="1"/>
+          </p:cNvSpPr>
+          <p:nvPr>
+            <p:ph type="sldImg" idx="2"/>
+          </p:nvPr>
+        </p:nvSpPr>
+        <p:spPr/>
+      </p:sp>
+      <p:sp>
+        <p:nvSpPr>
+          <p:cNvPr id="3" name="Notes Placeholder 2"/>
+          <p:cNvSpPr>
+            <a:spLocks noGrp="1"/>
+          </p:cNvSpPr>
+          <p:nvPr>
+            <p:ph type="body" idx="3" sz="quarter"/>
+          </p:nvPr>
+        </p:nvSpPr>
+        <p:spPr/>
+        <p:txBody>
+          <a:bodyPr/>
+          <a:lstStyle/>
+          <a:p>
+            <a:r>
+              <a:t>Implement resize_soft that preserves area, then pack. Assert soft A ends at two by three with area six and a legal outline fit.</a:t>
+            </a:r>
+          </a:p>
+        </p:txBody>
+      </p:sp>
+      <p:sp>
+        <p:nvSpPr>
+          <p:cNvPr id="4" name="Slide Number Placeholder 3"/>
+          <p:cNvSpPr>
+            <a:spLocks noGrp="1"/>
+          </p:cNvSpPr>
+          <p:nvPr>
+            <p:ph type="sldNum" idx="5" sz="quarter"/>
+          </p:nvPr>
+        </p:nvSpPr>
+        <p:spPr/>
+      </p:sp>
+    </p:spTree>
+  </p:cSld>
+  <p:clrMapOvr>
+    <a:masterClrMapping/>
+  </p:clrMapOvr>
+</p:notes>
+</file>
+
+<file path=ppt/notesSlides/notesSlide9.xml><?xml version="1.0" encoding="utf-8"?>
+<p:notes xmlns:a="http://schemas.openxmlformats.org/drawingml/2006/main" xmlns:p="http://schemas.openxmlformats.org/presentationml/2006/main" xmlns:r="http://schemas.openxmlformats.org/officeDocument/2006/relationships">
+  <p:cSld>
+    <p:spTree>
+      <p:nvGrpSpPr>
+        <p:cNvPr id="1" name=""/>
+        <p:cNvGrpSpPr/>
+        <p:nvPr/>
+      </p:nvGrpSpPr>
+      <p:grpSpPr>
+        <a:xfrm>
+          <a:off x="0" y="0"/>
+          <a:ext cx="0" cy="0"/>
+          <a:chOff x="0" y="0"/>
+          <a:chExt cx="0" cy="0"/>
+        </a:xfrm>
+      </p:grpSpPr>
+      <p:sp>
+        <p:nvSpPr>
+          <p:cNvPr id="2" name="Slide Image Placeholder 1"/>
+          <p:cNvSpPr>
+            <a:spLocks noGrp="1"/>
+          </p:cNvSpPr>
+          <p:nvPr>
+            <p:ph type="sldImg" idx="2"/>
+          </p:nvPr>
+        </p:nvSpPr>
+        <p:spPr/>
+      </p:sp>
+      <p:sp>
+        <p:nvSpPr>
+          <p:cNvPr id="3" name="Notes Placeholder 2"/>
+          <p:cNvSpPr>
+            <a:spLocks noGrp="1"/>
+          </p:cNvSpPr>
+          <p:nvPr>
+            <p:ph type="body" idx="3" sz="quarter"/>
+          </p:nvPr>
+        </p:nvSpPr>
+        <p:spPr/>
+        <p:txBody>
+          <a:bodyPr/>
+          <a:lstStyle/>
+          <a:p>
+            <a:r>
+              <a:t>Changing area when reshaping; ignoring aspect bounds; leaving hard modules soft by mistake.</a:t>
             </a:r>
           </a:p>
         </p:txBody>
@@ -3900,7 +4196,7 @@
                 </a:solidFill>
                 <a:latin typeface="Calibri"/>
               </a:rPr>
-              <a:t>Soft module sizing</a:t>
+              <a:t>Soft module aspect sizing</a:t>
             </a:r>
           </a:p>
           <a:p>
@@ -3919,7 +4215,7 @@
                 </a:solidFill>
                 <a:latin typeface="Calibri"/>
               </a:rPr>
-              <a:t>Hard modules have fixed width and height</a:t>
+              <a:t>Soft module A keeps area six but may reshape between aspect one half and two</a:t>
             </a:r>
           </a:p>
         </p:txBody>
@@ -3927,6 +4223,169 @@
       <p:sp>
         <p:nvSpPr>
           <p:cNvPr id="3" name="TextBox 2"/>
+          <p:cNvSpPr txBox="1"/>
+          <p:nvPr/>
+        </p:nvSpPr>
+        <p:spPr>
+          <a:xfrm>
+            <a:off x="548640" y="6355080"/>
+            <a:ext cx="11064240" cy="320040"/>
+          </a:xfrm>
+          <a:prstGeom prst="rect">
+            <a:avLst/>
+          </a:prstGeom>
+          <a:noFill/>
+        </p:spPr>
+        <p:txBody>
+          <a:bodyPr wrap="square">
+            <a:noAutofit/>
+          </a:bodyPr>
+          <a:lstStyle/>
+          <a:p>
+            <a:pPr algn="r">
+              <a:lnSpc>
+                <a:spcPts val="2200"/>
+              </a:lnSpc>
+              <a:defRPr sz="1000" b="0">
+                <a:solidFill>
+                  <a:srgbClr val="666666"/>
+                </a:solidFill>
+                <a:latin typeface="Calibri"/>
+              </a:defRPr>
+            </a:pPr>
+            <a:r>
+              <a:t>learn_floorplanning — 03 soft module sizing</a:t>
+            </a:r>
+          </a:p>
+        </p:txBody>
+      </p:sp>
+    </p:spTree>
+  </p:cSld>
+  <p:clrMapOvr>
+    <a:masterClrMapping/>
+  </p:clrMapOvr>
+</p:sld>
+</file>
+
+<file path=ppt/slides/slide10.xml><?xml version="1.0" encoding="utf-8"?>
+<p:sld xmlns:a="http://schemas.openxmlformats.org/drawingml/2006/main" xmlns:p="http://schemas.openxmlformats.org/presentationml/2006/main" xmlns:r="http://schemas.openxmlformats.org/officeDocument/2006/relationships">
+  <p:cSld>
+    <p:spTree>
+      <p:nvGrpSpPr>
+        <p:cNvPr id="1" name=""/>
+        <p:cNvGrpSpPr/>
+        <p:nvPr/>
+      </p:nvGrpSpPr>
+      <p:grpSpPr/>
+      <p:sp>
+        <p:nvSpPr>
+          <p:cNvPr id="2" name="TextBox 1"/>
+          <p:cNvSpPr txBox="1"/>
+          <p:nvPr/>
+        </p:nvSpPr>
+        <p:spPr>
+          <a:xfrm>
+            <a:off x="548640" y="411480"/>
+            <a:ext cx="11064240" cy="777240"/>
+          </a:xfrm>
+          <a:prstGeom prst="rect">
+            <a:avLst/>
+          </a:prstGeom>
+          <a:noFill/>
+        </p:spPr>
+        <p:txBody>
+          <a:bodyPr wrap="square">
+            <a:noAutofit/>
+          </a:bodyPr>
+          <a:lstStyle/>
+          <a:p>
+            <a:pPr>
+              <a:lnSpc>
+                <a:spcPts val="2200"/>
+              </a:lnSpc>
+            </a:pPr>
+            <a:r>
+              <a:rPr sz="2800" b="1">
+                <a:solidFill>
+                  <a:srgbClr val="1A1A2E"/>
+                </a:solidFill>
+                <a:latin typeface="Calibri"/>
+              </a:rPr>
+              <a:t>Your turn</a:t>
+            </a:r>
+          </a:p>
+        </p:txBody>
+      </p:sp>
+      <p:sp>
+        <p:nvSpPr>
+          <p:cNvPr id="3" name="TextBox 2"/>
+          <p:cNvSpPr txBox="1"/>
+          <p:nvPr/>
+        </p:nvSpPr>
+        <p:spPr>
+          <a:xfrm>
+            <a:off x="548640" y="1234440"/>
+            <a:ext cx="11064240" cy="4937760"/>
+          </a:xfrm>
+          <a:prstGeom prst="rect">
+            <a:avLst/>
+          </a:prstGeom>
+          <a:noFill/>
+        </p:spPr>
+        <p:txBody>
+          <a:bodyPr wrap="square">
+            <a:noAutofit/>
+          </a:bodyPr>
+          <a:lstStyle/>
+          <a:p>
+            <a:pPr lvl="0" marL="457200" indent="-228600">
+              <a:buFont typeface="Calibri"/>
+              <a:spcAft>
+                <a:spcPts val="1000"/>
+              </a:spcAft>
+              <a:buSzPct val="100000"/>
+              <a:buChar char="•"/>
+              <a:lnSpc>
+                <a:spcPts val="2200"/>
+              </a:lnSpc>
+            </a:pPr>
+            <a:r>
+              <a:rPr sz="2000" b="0">
+                <a:solidFill>
+                  <a:srgbClr val="333333"/>
+                </a:solidFill>
+                <a:latin typeface="Calibri"/>
+              </a:rPr>
+              <a:t>Accept a legal soft packing with A at two by three</a:t>
+            </a:r>
+          </a:p>
+          <a:p>
+            <a:pPr lvl="0" marL="457200" indent="-228600">
+              <a:buFont typeface="Calibri"/>
+              <a:spcAft>
+                <a:spcPts val="1000"/>
+              </a:spcAft>
+              <a:buSzPct val="100000"/>
+              <a:buChar char="•"/>
+              <a:lnSpc>
+                <a:spcPts val="2200"/>
+              </a:lnSpc>
+            </a:pPr>
+            <a:r>
+              <a:rPr sz="2000" b="0">
+                <a:solidFill>
+                  <a:srgbClr val="333333"/>
+                </a:solidFill>
+                <a:latin typeface="Calibri"/>
+              </a:rPr>
+              <a:t>Next: fix macro D at the origin</a:t>
+            </a:r>
+          </a:p>
+        </p:txBody>
+      </p:sp>
+      <p:sp>
+        <p:nvSpPr>
+          <p:cNvPr id="4" name="TextBox 3"/>
           <p:cNvSpPr txBox="1"/>
           <p:nvPr/>
         </p:nvSpPr>
@@ -4015,21 +4474,45 @@
                 </a:solidFill>
                 <a:latin typeface="Calibri"/>
               </a:rPr>
-              <a:t>The idea</a:t>
-            </a:r>
-          </a:p>
-        </p:txBody>
-      </p:sp>
-      <p:sp>
-        <p:nvSpPr>
-          <p:cNvPr id="3" name="TextBox 2"/>
+              <a:t>A is soft with area 6</a:t>
+            </a:r>
+          </a:p>
+        </p:txBody>
+      </p:sp>
+      <p:pic>
+        <p:nvPicPr>
+          <p:cNvPr id="3" name="Picture 2" descr="01-soft-a.png"/>
+          <p:cNvPicPr>
+            <a:picLocks noChangeAspect="1"/>
+          </p:cNvPicPr>
+          <p:nvPr/>
+        </p:nvPicPr>
+        <p:blipFill>
+          <a:blip r:embed="rId2"/>
+          <a:stretch>
+            <a:fillRect/>
+          </a:stretch>
+        </p:blipFill>
+        <p:spPr>
+          <a:xfrm>
+            <a:off x="548640" y="1143000"/>
+            <a:ext cx="9424736" cy="4572000"/>
+          </a:xfrm>
+          <a:prstGeom prst="rect">
+            <a:avLst/>
+          </a:prstGeom>
+        </p:spPr>
+      </p:pic>
+      <p:sp>
+        <p:nvSpPr>
+          <p:cNvPr id="4" name="TextBox 3"/>
           <p:cNvSpPr txBox="1"/>
           <p:nvPr/>
         </p:nvSpPr>
         <p:spPr>
           <a:xfrm>
-            <a:off x="548640" y="1234440"/>
-            <a:ext cx="11064240" cy="4937760"/>
+            <a:off x="548640" y="5897880"/>
+            <a:ext cx="11064240" cy="411480"/>
           </a:xfrm>
           <a:prstGeom prst="rect">
             <a:avLst/>
@@ -4042,98 +4525,26 @@
           </a:bodyPr>
           <a:lstStyle/>
           <a:p>
-            <a:pPr lvl="0" marL="457200" indent="-228600">
-              <a:buFont typeface="Calibri"/>
-              <a:spcAft>
-                <a:spcPts val="1000"/>
-              </a:spcAft>
-              <a:buSzPct val="100000"/>
-              <a:buChar char="•"/>
+            <a:pPr>
               <a:lnSpc>
                 <a:spcPts val="2200"/>
               </a:lnSpc>
             </a:pPr>
             <a:r>
-              <a:rPr sz="2000" b="0">
+              <a:rPr sz="1200" b="0">
                 <a:solidFill>
                   <a:srgbClr val="333333"/>
                 </a:solidFill>
                 <a:latin typeface="Calibri"/>
               </a:rPr>
-              <a:t>For soft module A with area a</a:t>
-            </a:r>
-          </a:p>
-          <a:p>
-            <a:pPr lvl="0" marL="457200" indent="-228600">
-              <a:buFont typeface="Calibri"/>
-              <a:spcAft>
-                <a:spcPts val="1000"/>
-              </a:spcAft>
-              <a:buSzPct val="100000"/>
-              <a:buChar char="•"/>
-              <a:lnSpc>
-                <a:spcPts val="2200"/>
-              </a:lnSpc>
-            </a:pPr>
-            <a:r>
-              <a:rPr sz="2000" b="0">
-                <a:solidFill>
-                  <a:srgbClr val="333333"/>
-                </a:solidFill>
-                <a:latin typeface="Calibri"/>
-              </a:rPr>
-              <a:t>Re-pack after each sizing move</a:t>
-            </a:r>
-          </a:p>
-          <a:p>
-            <a:pPr lvl="0" marL="457200" indent="-228600">
-              <a:buFont typeface="Calibri"/>
-              <a:spcAft>
-                <a:spcPts val="1000"/>
-              </a:spcAft>
-              <a:buSzPct val="100000"/>
-              <a:buChar char="•"/>
-              <a:lnSpc>
-                <a:spcPts val="2200"/>
-              </a:lnSpc>
-            </a:pPr>
-            <a:r>
-              <a:rPr sz="2000" b="0">
-                <a:solidFill>
-                  <a:srgbClr val="333333"/>
-                </a:solidFill>
-                <a:latin typeface="Calibri"/>
-              </a:rPr>
-              <a:t>On our starter, A is soft; B through E stay hard</a:t>
-            </a:r>
-          </a:p>
-          <a:p>
-            <a:pPr lvl="0" marL="457200" indent="-228600">
-              <a:buFont typeface="Calibri"/>
-              <a:spcAft>
-                <a:spcPts val="1000"/>
-              </a:spcAft>
-              <a:buSzPct val="100000"/>
-              <a:buChar char="•"/>
-              <a:lnSpc>
-                <a:spcPts val="2200"/>
-              </a:lnSpc>
-            </a:pPr>
-            <a:r>
-              <a:rPr sz="2000" b="0">
-                <a:solidFill>
-                  <a:srgbClr val="333333"/>
-                </a:solidFill>
-                <a:latin typeface="Calibri"/>
-              </a:rPr>
-              <a:t>Deadspace uses the same formula</a:t>
-            </a:r>
-          </a:p>
-        </p:txBody>
-      </p:sp>
-      <p:sp>
-        <p:nvSpPr>
-          <p:cNvPr id="4" name="TextBox 3"/>
+              <a:t>A is soft with area 6</a:t>
+            </a:r>
+          </a:p>
+        </p:txBody>
+      </p:sp>
+      <p:sp>
+        <p:nvSpPr>
+          <p:cNvPr id="5" name="TextBox 4"/>
           <p:cNvSpPr txBox="1"/>
           <p:nvPr/>
         </p:nvSpPr>
@@ -4222,21 +4633,45 @@
                 </a:solidFill>
                 <a:latin typeface="Calibri"/>
               </a:rPr>
-              <a:t>Browser lab track</a:t>
-            </a:r>
-          </a:p>
-        </p:txBody>
-      </p:sp>
-      <p:sp>
-        <p:nvSpPr>
-          <p:cNvPr id="3" name="TextBox 2"/>
+              <a:t>Reshape A to 2×3</a:t>
+            </a:r>
+          </a:p>
+        </p:txBody>
+      </p:sp>
+      <p:pic>
+        <p:nvPicPr>
+          <p:cNvPr id="3" name="Picture 2" descr="02-reshape.png"/>
+          <p:cNvPicPr>
+            <a:picLocks noChangeAspect="1"/>
+          </p:cNvPicPr>
+          <p:nvPr/>
+        </p:nvPicPr>
+        <p:blipFill>
+          <a:blip r:embed="rId2"/>
+          <a:stretch>
+            <a:fillRect/>
+          </a:stretch>
+        </p:blipFill>
+        <p:spPr>
+          <a:xfrm>
+            <a:off x="548640" y="1143000"/>
+            <a:ext cx="9424736" cy="4572000"/>
+          </a:xfrm>
+          <a:prstGeom prst="rect">
+            <a:avLst/>
+          </a:prstGeom>
+        </p:spPr>
+      </p:pic>
+      <p:sp>
+        <p:nvSpPr>
+          <p:cNvPr id="4" name="TextBox 3"/>
           <p:cNvSpPr txBox="1"/>
           <p:nvPr/>
         </p:nvSpPr>
         <p:spPr>
           <a:xfrm>
-            <a:off x="548640" y="1234440"/>
-            <a:ext cx="11064240" cy="4937760"/>
+            <a:off x="548640" y="5897880"/>
+            <a:ext cx="11064240" cy="411480"/>
           </a:xfrm>
           <a:prstGeom prst="rect">
             <a:avLst/>
@@ -4249,107 +4684,26 @@
           </a:bodyPr>
           <a:lstStyle/>
           <a:p>
-            <a:pPr lvl="0" marL="457200" indent="-228600">
-              <a:buFont typeface="Calibri"/>
-              <a:spcAft>
-                <a:spcPts val="1000"/>
-              </a:spcAft>
-              <a:buSzPct val="100000"/>
-              <a:buChar char="•"/>
+            <a:pPr>
               <a:lnSpc>
                 <a:spcPts val="2200"/>
               </a:lnSpc>
             </a:pPr>
             <a:r>
-              <a:rPr sz="2000" b="0">
+              <a:rPr sz="1200" b="0">
                 <a:solidFill>
                   <a:srgbClr val="333333"/>
                 </a:solidFill>
                 <a:latin typeface="Calibri"/>
               </a:rPr>
-              <a:t>Open </a:t>
-            </a:r>
-            <a:r>
-              <a:rPr sz="2000" b="1">
-                <a:solidFill>
-                  <a:srgbClr val="333333"/>
-                </a:solidFill>
-                <a:latin typeface="Calibri"/>
-              </a:rPr>
-              <a:t>soft-module-sizing</a:t>
-            </a:r>
-          </a:p>
-          <a:p>
-            <a:pPr lvl="0" marL="457200" indent="-228600">
-              <a:buFont typeface="Calibri"/>
-              <a:spcAft>
-                <a:spcPts val="1000"/>
-              </a:spcAft>
-              <a:buSzPct val="100000"/>
-              <a:buChar char="•"/>
-              <a:lnSpc>
-                <a:spcPts val="2200"/>
-              </a:lnSpc>
-            </a:pPr>
-            <a:r>
-              <a:rPr sz="2000" b="0">
-                <a:solidFill>
-                  <a:srgbClr val="333333"/>
-                </a:solidFill>
-                <a:latin typeface="Calibri"/>
-              </a:rPr>
-              <a:t>Select module A, drag aspect within bounds</a:t>
-            </a:r>
-          </a:p>
-          <a:p>
-            <a:pPr lvl="0" marL="457200" indent="-228600">
-              <a:buFont typeface="Calibri"/>
-              <a:spcAft>
-                <a:spcPts val="1000"/>
-              </a:spcAft>
-              <a:buSzPct val="100000"/>
-              <a:buChar char="•"/>
-              <a:lnSpc>
-                <a:spcPts val="2200"/>
-              </a:lnSpc>
-            </a:pPr>
-            <a:r>
-              <a:rPr sz="2000" b="0">
-                <a:solidFill>
-                  <a:srgbClr val="333333"/>
-                </a:solidFill>
-                <a:latin typeface="Calibri"/>
-              </a:rPr>
-              <a:t>Confirm area of A stays constant while density of the packing geometry changes</a:t>
-            </a:r>
-          </a:p>
-          <a:p>
-            <a:pPr lvl="0" marL="457200" indent="-228600">
-              <a:buFont typeface="Calibri"/>
-              <a:spcAft>
-                <a:spcPts val="1000"/>
-              </a:spcAft>
-              <a:buSzPct val="100000"/>
-              <a:buChar char="•"/>
-              <a:lnSpc>
-                <a:spcPts val="2200"/>
-              </a:lnSpc>
-            </a:pPr>
-            <a:r>
-              <a:rPr sz="2000" b="0">
-                <a:solidFill>
-                  <a:srgbClr val="333333"/>
-                </a:solidFill>
-                <a:latin typeface="Calibri"/>
-              </a:rPr>
-              <a:t>Then implement aspect moves in Track A</a:t>
-            </a:r>
-          </a:p>
-        </p:txBody>
-      </p:sp>
-      <p:sp>
-        <p:nvSpPr>
-          <p:cNvPr id="4" name="TextBox 3"/>
+              <a:t>Reshape A to 2×3</a:t>
+            </a:r>
+          </a:p>
+        </p:txBody>
+      </p:sp>
+      <p:sp>
+        <p:nvSpPr>
+          <p:cNvPr id="5" name="TextBox 4"/>
           <p:cNvSpPr txBox="1"/>
           <p:nvPr/>
         </p:nvSpPr>
@@ -4438,21 +4792,45 @@
                 </a:solidFill>
                 <a:latin typeface="Calibri"/>
               </a:rPr>
-              <a:t>Implement track</a:t>
-            </a:r>
-          </a:p>
-        </p:txBody>
-      </p:sp>
-      <p:sp>
-        <p:nvSpPr>
-          <p:cNvPr id="3" name="TextBox 2"/>
+              <a:t>Soft packing stays legal</a:t>
+            </a:r>
+          </a:p>
+        </p:txBody>
+      </p:sp>
+      <p:pic>
+        <p:nvPicPr>
+          <p:cNvPr id="3" name="Picture 2" descr="03-legal.png"/>
+          <p:cNvPicPr>
+            <a:picLocks noChangeAspect="1"/>
+          </p:cNvPicPr>
+          <p:nvPr/>
+        </p:nvPicPr>
+        <p:blipFill>
+          <a:blip r:embed="rId2"/>
+          <a:stretch>
+            <a:fillRect/>
+          </a:stretch>
+        </p:blipFill>
+        <p:spPr>
+          <a:xfrm>
+            <a:off x="548640" y="1143000"/>
+            <a:ext cx="9424736" cy="4572000"/>
+          </a:xfrm>
+          <a:prstGeom prst="rect">
+            <a:avLst/>
+          </a:prstGeom>
+        </p:spPr>
+      </p:pic>
+      <p:sp>
+        <p:nvSpPr>
+          <p:cNvPr id="4" name="TextBox 3"/>
           <p:cNvSpPr txBox="1"/>
           <p:nvPr/>
         </p:nvSpPr>
         <p:spPr>
           <a:xfrm>
-            <a:off x="548640" y="1234440"/>
-            <a:ext cx="11064240" cy="4937760"/>
+            <a:off x="548640" y="5897880"/>
+            <a:ext cx="11064240" cy="411480"/>
           </a:xfrm>
           <a:prstGeom prst="rect">
             <a:avLst/>
@@ -4465,98 +4843,26 @@
           </a:bodyPr>
           <a:lstStyle/>
           <a:p>
-            <a:pPr lvl="0" marL="457200" indent="-228600">
-              <a:buFont typeface="Calibri"/>
-              <a:spcAft>
-                <a:spcPts val="1000"/>
-              </a:spcAft>
-              <a:buSzPct val="100000"/>
-              <a:buChar char="•"/>
+            <a:pPr>
               <a:lnSpc>
                 <a:spcPts val="2200"/>
               </a:lnSpc>
             </a:pPr>
             <a:r>
-              <a:rPr sz="2000" b="0">
+              <a:rPr sz="1200" b="0">
                 <a:solidFill>
                   <a:srgbClr val="333333"/>
                 </a:solidFill>
                 <a:latin typeface="Calibri"/>
               </a:rPr>
-              <a:t>Extend your packer so A’s (w, h) can vary under aspect constraints at constant area</a:t>
-            </a:r>
-          </a:p>
-          <a:p>
-            <a:pPr lvl="0" marL="457200" indent="-228600">
-              <a:buFont typeface="Calibri"/>
-              <a:spcAft>
-                <a:spcPts val="1000"/>
-              </a:spcAft>
-              <a:buSzPct val="100000"/>
-              <a:buChar char="•"/>
-              <a:lnSpc>
-                <a:spcPts val="2200"/>
-              </a:lnSpc>
-            </a:pPr>
-            <a:r>
-              <a:rPr sz="2000" b="0">
-                <a:solidFill>
-                  <a:srgbClr val="333333"/>
-                </a:solidFill>
-                <a:latin typeface="Calibri"/>
-              </a:rPr>
-              <a:t>Combine with a simple search, even greedy aspect tries help</a:t>
-            </a:r>
-          </a:p>
-          <a:p>
-            <a:pPr lvl="0" marL="457200" indent="-228600">
-              <a:buFont typeface="Calibri"/>
-              <a:spcAft>
-                <a:spcPts val="1000"/>
-              </a:spcAft>
-              <a:buSzPct val="100000"/>
-              <a:buChar char="•"/>
-              <a:lnSpc>
-                <a:spcPts val="2200"/>
-              </a:lnSpc>
-            </a:pPr>
-            <a:r>
-              <a:rPr sz="2000" b="0">
-                <a:solidFill>
-                  <a:srgbClr val="333333"/>
-                </a:solidFill>
-                <a:latin typeface="Calibri"/>
-              </a:rPr>
-              <a:t>Report legality and deadspace before and after</a:t>
-            </a:r>
-          </a:p>
-          <a:p>
-            <a:pPr lvl="0" marL="457200" indent="-228600">
-              <a:buFont typeface="Calibri"/>
-              <a:spcAft>
-                <a:spcPts val="1000"/>
-              </a:spcAft>
-              <a:buSzPct val="100000"/>
-              <a:buChar char="•"/>
-              <a:lnSpc>
-                <a:spcPts val="2200"/>
-              </a:lnSpc>
-            </a:pPr>
-            <a:r>
-              <a:rPr sz="2000" b="0">
-                <a:solidFill>
-                  <a:srgbClr val="333333"/>
-                </a:solidFill>
-                <a:latin typeface="Calibri"/>
-              </a:rPr>
-              <a:t>Reject sizes outside aspect bounds</a:t>
-            </a:r>
-          </a:p>
-        </p:txBody>
-      </p:sp>
-      <p:sp>
-        <p:nvSpPr>
-          <p:cNvPr id="4" name="TextBox 3"/>
+              <a:t>Soft packing stays legal</a:t>
+            </a:r>
+          </a:p>
+        </p:txBody>
+      </p:sp>
+      <p:sp>
+        <p:nvSpPr>
+          <p:cNvPr id="5" name="TextBox 4"/>
           <p:cNvSpPr txBox="1"/>
           <p:nvPr/>
         </p:nvSpPr>
@@ -4645,21 +4951,45 @@
                 </a:solidFill>
                 <a:latin typeface="Calibri"/>
               </a:rPr>
-              <a:t>Pitfalls</a:t>
-            </a:r>
-          </a:p>
-        </p:txBody>
-      </p:sp>
-      <p:sp>
-        <p:nvSpPr>
-          <p:cNvPr id="3" name="TextBox 2"/>
+              <a:t>Hard vs soft views</a:t>
+            </a:r>
+          </a:p>
+        </p:txBody>
+      </p:sp>
+      <p:pic>
+        <p:nvPicPr>
+          <p:cNvPr id="3" name="Picture 2" descr="04-compare.png"/>
+          <p:cNvPicPr>
+            <a:picLocks noChangeAspect="1"/>
+          </p:cNvPicPr>
+          <p:nvPr/>
+        </p:nvPicPr>
+        <p:blipFill>
+          <a:blip r:embed="rId2"/>
+          <a:stretch>
+            <a:fillRect/>
+          </a:stretch>
+        </p:blipFill>
+        <p:spPr>
+          <a:xfrm>
+            <a:off x="548640" y="1143000"/>
+            <a:ext cx="9424736" cy="4572000"/>
+          </a:xfrm>
+          <a:prstGeom prst="rect">
+            <a:avLst/>
+          </a:prstGeom>
+        </p:spPr>
+      </p:pic>
+      <p:sp>
+        <p:nvSpPr>
+          <p:cNvPr id="4" name="TextBox 3"/>
           <p:cNvSpPr txBox="1"/>
           <p:nvPr/>
         </p:nvSpPr>
         <p:spPr>
           <a:xfrm>
-            <a:off x="548640" y="1234440"/>
-            <a:ext cx="11064240" cy="4937760"/>
+            <a:off x="548640" y="5897880"/>
+            <a:ext cx="11064240" cy="411480"/>
           </a:xfrm>
           <a:prstGeom prst="rect">
             <a:avLst/>
@@ -4672,76 +5002,26 @@
           </a:bodyPr>
           <a:lstStyle/>
           <a:p>
-            <a:pPr lvl="0" marL="457200" indent="-228600">
-              <a:buFont typeface="Calibri"/>
-              <a:spcAft>
-                <a:spcPts val="1000"/>
-              </a:spcAft>
-              <a:buSzPct val="100000"/>
-              <a:buChar char="•"/>
+            <a:pPr>
               <a:lnSpc>
                 <a:spcPts val="2200"/>
               </a:lnSpc>
             </a:pPr>
             <a:r>
-              <a:rPr sz="2000" b="0">
+              <a:rPr sz="1200" b="0">
                 <a:solidFill>
                   <a:srgbClr val="333333"/>
                 </a:solidFill>
                 <a:latin typeface="Calibri"/>
               </a:rPr>
-              <a:t>Using aspect limits on w/h but updating only w without fixing h = area/w breaks the area</a:t>
-            </a:r>
-          </a:p>
-          <a:p>
-            <a:pPr lvl="0" marL="457200" indent="-228600">
-              <a:buFont typeface="Calibri"/>
-              <a:spcAft>
-                <a:spcPts val="1000"/>
-              </a:spcAft>
-              <a:buSzPct val="100000"/>
-              <a:buChar char="•"/>
-              <a:lnSpc>
-                <a:spcPts val="2200"/>
-              </a:lnSpc>
-            </a:pPr>
-            <a:r>
-              <a:rPr sz="2000" b="0">
-                <a:solidFill>
-                  <a:srgbClr val="333333"/>
-                </a:solidFill>
-                <a:latin typeface="Calibri"/>
-              </a:rPr>
-              <a:t>Allowing zero width is nonsense, enforce positive sizes</a:t>
-            </a:r>
-          </a:p>
-          <a:p>
-            <a:pPr lvl="0" marL="457200" indent="-228600">
-              <a:buFont typeface="Calibri"/>
-              <a:spcAft>
-                <a:spcPts val="1000"/>
-              </a:spcAft>
-              <a:buSzPct val="100000"/>
-              <a:buChar char="•"/>
-              <a:lnSpc>
-                <a:spcPts val="2200"/>
-              </a:lnSpc>
-            </a:pPr>
-            <a:r>
-              <a:rPr sz="2000" b="0">
-                <a:solidFill>
-                  <a:srgbClr val="333333"/>
-                </a:solidFill>
-                <a:latin typeface="Calibri"/>
-              </a:rPr>
-              <a:t>Soft sizing cannot fix an area budget that already exceeds the outline</a:t>
-            </a:r>
-          </a:p>
-        </p:txBody>
-      </p:sp>
-      <p:sp>
-        <p:nvSpPr>
-          <p:cNvPr id="4" name="TextBox 3"/>
+              <a:t>Hard vs soft views</a:t>
+            </a:r>
+          </a:p>
+        </p:txBody>
+      </p:sp>
+      <p:sp>
+        <p:nvSpPr>
+          <p:cNvPr id="5" name="TextBox 4"/>
           <p:cNvSpPr txBox="1"/>
           <p:nvPr/>
         </p:nvSpPr>
@@ -4830,7 +5110,166 @@
                 </a:solidFill>
                 <a:latin typeface="Calibri"/>
               </a:rPr>
-              <a:t>Your turn</a:t>
+              <a:t>Softness is constrained freedom</a:t>
+            </a:r>
+          </a:p>
+        </p:txBody>
+      </p:sp>
+      <p:pic>
+        <p:nvPicPr>
+          <p:cNvPr id="3" name="Picture 2" descr="05-takeaway.png"/>
+          <p:cNvPicPr>
+            <a:picLocks noChangeAspect="1"/>
+          </p:cNvPicPr>
+          <p:nvPr/>
+        </p:nvPicPr>
+        <p:blipFill>
+          <a:blip r:embed="rId2"/>
+          <a:stretch>
+            <a:fillRect/>
+          </a:stretch>
+        </p:blipFill>
+        <p:spPr>
+          <a:xfrm>
+            <a:off x="548640" y="1143000"/>
+            <a:ext cx="9424736" cy="4572000"/>
+          </a:xfrm>
+          <a:prstGeom prst="rect">
+            <a:avLst/>
+          </a:prstGeom>
+        </p:spPr>
+      </p:pic>
+      <p:sp>
+        <p:nvSpPr>
+          <p:cNvPr id="4" name="TextBox 3"/>
+          <p:cNvSpPr txBox="1"/>
+          <p:nvPr/>
+        </p:nvSpPr>
+        <p:spPr>
+          <a:xfrm>
+            <a:off x="548640" y="5897880"/>
+            <a:ext cx="11064240" cy="411480"/>
+          </a:xfrm>
+          <a:prstGeom prst="rect">
+            <a:avLst/>
+          </a:prstGeom>
+          <a:noFill/>
+        </p:spPr>
+        <p:txBody>
+          <a:bodyPr wrap="square">
+            <a:noAutofit/>
+          </a:bodyPr>
+          <a:lstStyle/>
+          <a:p>
+            <a:pPr>
+              <a:lnSpc>
+                <a:spcPts val="2200"/>
+              </a:lnSpc>
+            </a:pPr>
+            <a:r>
+              <a:rPr sz="1200" b="0">
+                <a:solidFill>
+                  <a:srgbClr val="333333"/>
+                </a:solidFill>
+                <a:latin typeface="Calibri"/>
+              </a:rPr>
+              <a:t>Softness is constrained freedom</a:t>
+            </a:r>
+          </a:p>
+        </p:txBody>
+      </p:sp>
+      <p:sp>
+        <p:nvSpPr>
+          <p:cNvPr id="5" name="TextBox 4"/>
+          <p:cNvSpPr txBox="1"/>
+          <p:nvPr/>
+        </p:nvSpPr>
+        <p:spPr>
+          <a:xfrm>
+            <a:off x="548640" y="6355080"/>
+            <a:ext cx="11064240" cy="320040"/>
+          </a:xfrm>
+          <a:prstGeom prst="rect">
+            <a:avLst/>
+          </a:prstGeom>
+          <a:noFill/>
+        </p:spPr>
+        <p:txBody>
+          <a:bodyPr wrap="square">
+            <a:noAutofit/>
+          </a:bodyPr>
+          <a:lstStyle/>
+          <a:p>
+            <a:pPr algn="r">
+              <a:lnSpc>
+                <a:spcPts val="2200"/>
+              </a:lnSpc>
+              <a:defRPr sz="1000" b="0">
+                <a:solidFill>
+                  <a:srgbClr val="666666"/>
+                </a:solidFill>
+                <a:latin typeface="Calibri"/>
+              </a:defRPr>
+            </a:pPr>
+            <a:r>
+              <a:t>learn_floorplanning — 03 soft module sizing</a:t>
+            </a:r>
+          </a:p>
+        </p:txBody>
+      </p:sp>
+    </p:spTree>
+  </p:cSld>
+  <p:clrMapOvr>
+    <a:masterClrMapping/>
+  </p:clrMapOvr>
+</p:sld>
+</file>
+
+<file path=ppt/slides/slide7.xml><?xml version="1.0" encoding="utf-8"?>
+<p:sld xmlns:a="http://schemas.openxmlformats.org/drawingml/2006/main" xmlns:p="http://schemas.openxmlformats.org/presentationml/2006/main" xmlns:r="http://schemas.openxmlformats.org/officeDocument/2006/relationships">
+  <p:cSld>
+    <p:spTree>
+      <p:nvGrpSpPr>
+        <p:cNvPr id="1" name=""/>
+        <p:cNvGrpSpPr/>
+        <p:nvPr/>
+      </p:nvGrpSpPr>
+      <p:grpSpPr/>
+      <p:sp>
+        <p:nvSpPr>
+          <p:cNvPr id="2" name="TextBox 1"/>
+          <p:cNvSpPr txBox="1"/>
+          <p:nvPr/>
+        </p:nvSpPr>
+        <p:spPr>
+          <a:xfrm>
+            <a:off x="548640" y="411480"/>
+            <a:ext cx="11064240" cy="777240"/>
+          </a:xfrm>
+          <a:prstGeom prst="rect">
+            <a:avLst/>
+          </a:prstGeom>
+          <a:noFill/>
+        </p:spPr>
+        <p:txBody>
+          <a:bodyPr wrap="square">
+            <a:noAutofit/>
+          </a:bodyPr>
+          <a:lstStyle/>
+          <a:p>
+            <a:pPr>
+              <a:lnSpc>
+                <a:spcPts val="2200"/>
+              </a:lnSpc>
+            </a:pPr>
+            <a:r>
+              <a:rPr sz="2800" b="1">
+                <a:solidFill>
+                  <a:srgbClr val="1A1A2E"/>
+                </a:solidFill>
+                <a:latin typeface="Calibri"/>
+              </a:rPr>
+              <a:t>Browser lab track</a:t>
             </a:r>
           </a:p>
         </p:txBody>
@@ -4875,7 +5314,7 @@
                 </a:solidFill>
                 <a:latin typeface="Calibri"/>
               </a:rPr>
-              <a:t>Improve a legal packing by resizing A within bounds</a:t>
+              <a:t>Open soft-module-sizing</a:t>
             </a:r>
           </a:p>
           <a:p>
@@ -4897,7 +5336,333 @@
                 </a:solidFill>
                 <a:latin typeface="Calibri"/>
               </a:rPr>
-              <a:t>Next: hard macros that refuse to move or resize</a:t>
+              <a:t>Show hard three-by-two, then Reshape A to two by three</a:t>
+            </a:r>
+          </a:p>
+          <a:p>
+            <a:pPr lvl="0" marL="457200" indent="-228600">
+              <a:buFont typeface="Calibri"/>
+              <a:spcAft>
+                <a:spcPts val="1000"/>
+              </a:spcAft>
+              <a:buSzPct val="100000"/>
+              <a:buChar char="•"/>
+              <a:lnSpc>
+                <a:spcPts val="2200"/>
+              </a:lnSpc>
+            </a:pPr>
+            <a:r>
+              <a:rPr sz="2000" b="0">
+                <a:solidFill>
+                  <a:srgbClr val="333333"/>
+                </a:solidFill>
+                <a:latin typeface="Calibri"/>
+              </a:rPr>
+              <a:t>Confirm area six and legality true on the soft packing</a:t>
+            </a:r>
+          </a:p>
+        </p:txBody>
+      </p:sp>
+      <p:sp>
+        <p:nvSpPr>
+          <p:cNvPr id="4" name="TextBox 3"/>
+          <p:cNvSpPr txBox="1"/>
+          <p:nvPr/>
+        </p:nvSpPr>
+        <p:spPr>
+          <a:xfrm>
+            <a:off x="548640" y="6355080"/>
+            <a:ext cx="11064240" cy="320040"/>
+          </a:xfrm>
+          <a:prstGeom prst="rect">
+            <a:avLst/>
+          </a:prstGeom>
+          <a:noFill/>
+        </p:spPr>
+        <p:txBody>
+          <a:bodyPr wrap="square">
+            <a:noAutofit/>
+          </a:bodyPr>
+          <a:lstStyle/>
+          <a:p>
+            <a:pPr algn="r">
+              <a:lnSpc>
+                <a:spcPts val="2200"/>
+              </a:lnSpc>
+              <a:defRPr sz="1000" b="0">
+                <a:solidFill>
+                  <a:srgbClr val="666666"/>
+                </a:solidFill>
+                <a:latin typeface="Calibri"/>
+              </a:defRPr>
+            </a:pPr>
+            <a:r>
+              <a:t>learn_floorplanning — 03 soft module sizing</a:t>
+            </a:r>
+          </a:p>
+        </p:txBody>
+      </p:sp>
+    </p:spTree>
+  </p:cSld>
+  <p:clrMapOvr>
+    <a:masterClrMapping/>
+  </p:clrMapOvr>
+</p:sld>
+</file>
+
+<file path=ppt/slides/slide8.xml><?xml version="1.0" encoding="utf-8"?>
+<p:sld xmlns:a="http://schemas.openxmlformats.org/drawingml/2006/main" xmlns:p="http://schemas.openxmlformats.org/presentationml/2006/main" xmlns:r="http://schemas.openxmlformats.org/officeDocument/2006/relationships">
+  <p:cSld>
+    <p:spTree>
+      <p:nvGrpSpPr>
+        <p:cNvPr id="1" name=""/>
+        <p:cNvGrpSpPr/>
+        <p:nvPr/>
+      </p:nvGrpSpPr>
+      <p:grpSpPr/>
+      <p:sp>
+        <p:nvSpPr>
+          <p:cNvPr id="2" name="TextBox 1"/>
+          <p:cNvSpPr txBox="1"/>
+          <p:nvPr/>
+        </p:nvSpPr>
+        <p:spPr>
+          <a:xfrm>
+            <a:off x="548640" y="411480"/>
+            <a:ext cx="11064240" cy="777240"/>
+          </a:xfrm>
+          <a:prstGeom prst="rect">
+            <a:avLst/>
+          </a:prstGeom>
+          <a:noFill/>
+        </p:spPr>
+        <p:txBody>
+          <a:bodyPr wrap="square">
+            <a:noAutofit/>
+          </a:bodyPr>
+          <a:lstStyle/>
+          <a:p>
+            <a:pPr>
+              <a:lnSpc>
+                <a:spcPts val="2200"/>
+              </a:lnSpc>
+            </a:pPr>
+            <a:r>
+              <a:rPr sz="2800" b="1">
+                <a:solidFill>
+                  <a:srgbClr val="1A1A2E"/>
+                </a:solidFill>
+                <a:latin typeface="Calibri"/>
+              </a:rPr>
+              <a:t>Implement track</a:t>
+            </a:r>
+          </a:p>
+        </p:txBody>
+      </p:sp>
+      <p:sp>
+        <p:nvSpPr>
+          <p:cNvPr id="3" name="TextBox 2"/>
+          <p:cNvSpPr txBox="1"/>
+          <p:nvPr/>
+        </p:nvSpPr>
+        <p:spPr>
+          <a:xfrm>
+            <a:off x="548640" y="1234440"/>
+            <a:ext cx="11064240" cy="4937760"/>
+          </a:xfrm>
+          <a:prstGeom prst="rect">
+            <a:avLst/>
+          </a:prstGeom>
+          <a:noFill/>
+        </p:spPr>
+        <p:txBody>
+          <a:bodyPr wrap="square">
+            <a:noAutofit/>
+          </a:bodyPr>
+          <a:lstStyle/>
+          <a:p>
+            <a:pPr lvl="0" marL="457200" indent="-228600">
+              <a:buFont typeface="Calibri"/>
+              <a:spcAft>
+                <a:spcPts val="1000"/>
+              </a:spcAft>
+              <a:buSzPct val="100000"/>
+              <a:buChar char="•"/>
+              <a:lnSpc>
+                <a:spcPts val="2200"/>
+              </a:lnSpc>
+            </a:pPr>
+            <a:r>
+              <a:rPr sz="2000" b="0">
+                <a:solidFill>
+                  <a:srgbClr val="333333"/>
+                </a:solidFill>
+                <a:latin typeface="Calibri"/>
+              </a:rPr>
+              <a:t>Implement resize_soft that preserves area, then pack</a:t>
+            </a:r>
+          </a:p>
+          <a:p>
+            <a:pPr lvl="0" marL="457200" indent="-228600">
+              <a:buFont typeface="Calibri"/>
+              <a:spcAft>
+                <a:spcPts val="1000"/>
+              </a:spcAft>
+              <a:buSzPct val="100000"/>
+              <a:buChar char="•"/>
+              <a:lnSpc>
+                <a:spcPts val="2200"/>
+              </a:lnSpc>
+            </a:pPr>
+            <a:r>
+              <a:rPr sz="2000" b="0">
+                <a:solidFill>
+                  <a:srgbClr val="333333"/>
+                </a:solidFill>
+                <a:latin typeface="Calibri"/>
+              </a:rPr>
+              <a:t>Assert soft A ends at two by three with area six and a legal outline fit</a:t>
+            </a:r>
+          </a:p>
+        </p:txBody>
+      </p:sp>
+      <p:sp>
+        <p:nvSpPr>
+          <p:cNvPr id="4" name="TextBox 3"/>
+          <p:cNvSpPr txBox="1"/>
+          <p:nvPr/>
+        </p:nvSpPr>
+        <p:spPr>
+          <a:xfrm>
+            <a:off x="548640" y="6355080"/>
+            <a:ext cx="11064240" cy="320040"/>
+          </a:xfrm>
+          <a:prstGeom prst="rect">
+            <a:avLst/>
+          </a:prstGeom>
+          <a:noFill/>
+        </p:spPr>
+        <p:txBody>
+          <a:bodyPr wrap="square">
+            <a:noAutofit/>
+          </a:bodyPr>
+          <a:lstStyle/>
+          <a:p>
+            <a:pPr algn="r">
+              <a:lnSpc>
+                <a:spcPts val="2200"/>
+              </a:lnSpc>
+              <a:defRPr sz="1000" b="0">
+                <a:solidFill>
+                  <a:srgbClr val="666666"/>
+                </a:solidFill>
+                <a:latin typeface="Calibri"/>
+              </a:defRPr>
+            </a:pPr>
+            <a:r>
+              <a:t>learn_floorplanning — 03 soft module sizing</a:t>
+            </a:r>
+          </a:p>
+        </p:txBody>
+      </p:sp>
+    </p:spTree>
+  </p:cSld>
+  <p:clrMapOvr>
+    <a:masterClrMapping/>
+  </p:clrMapOvr>
+</p:sld>
+</file>
+
+<file path=ppt/slides/slide9.xml><?xml version="1.0" encoding="utf-8"?>
+<p:sld xmlns:a="http://schemas.openxmlformats.org/drawingml/2006/main" xmlns:p="http://schemas.openxmlformats.org/presentationml/2006/main" xmlns:r="http://schemas.openxmlformats.org/officeDocument/2006/relationships">
+  <p:cSld>
+    <p:spTree>
+      <p:nvGrpSpPr>
+        <p:cNvPr id="1" name=""/>
+        <p:cNvGrpSpPr/>
+        <p:nvPr/>
+      </p:nvGrpSpPr>
+      <p:grpSpPr/>
+      <p:sp>
+        <p:nvSpPr>
+          <p:cNvPr id="2" name="TextBox 1"/>
+          <p:cNvSpPr txBox="1"/>
+          <p:nvPr/>
+        </p:nvSpPr>
+        <p:spPr>
+          <a:xfrm>
+            <a:off x="548640" y="411480"/>
+            <a:ext cx="11064240" cy="777240"/>
+          </a:xfrm>
+          <a:prstGeom prst="rect">
+            <a:avLst/>
+          </a:prstGeom>
+          <a:noFill/>
+        </p:spPr>
+        <p:txBody>
+          <a:bodyPr wrap="square">
+            <a:noAutofit/>
+          </a:bodyPr>
+          <a:lstStyle/>
+          <a:p>
+            <a:pPr>
+              <a:lnSpc>
+                <a:spcPts val="2200"/>
+              </a:lnSpc>
+            </a:pPr>
+            <a:r>
+              <a:rPr sz="2800" b="1">
+                <a:solidFill>
+                  <a:srgbClr val="1A1A2E"/>
+                </a:solidFill>
+                <a:latin typeface="Calibri"/>
+              </a:rPr>
+              <a:t>Pitfalls</a:t>
+            </a:r>
+          </a:p>
+        </p:txBody>
+      </p:sp>
+      <p:sp>
+        <p:nvSpPr>
+          <p:cNvPr id="3" name="TextBox 2"/>
+          <p:cNvSpPr txBox="1"/>
+          <p:nvPr/>
+        </p:nvSpPr>
+        <p:spPr>
+          <a:xfrm>
+            <a:off x="548640" y="1234440"/>
+            <a:ext cx="11064240" cy="4937760"/>
+          </a:xfrm>
+          <a:prstGeom prst="rect">
+            <a:avLst/>
+          </a:prstGeom>
+          <a:noFill/>
+        </p:spPr>
+        <p:txBody>
+          <a:bodyPr wrap="square">
+            <a:noAutofit/>
+          </a:bodyPr>
+          <a:lstStyle/>
+          <a:p>
+            <a:pPr lvl="0" marL="457200" indent="-228600">
+              <a:buFont typeface="Calibri"/>
+              <a:spcAft>
+                <a:spcPts val="1000"/>
+              </a:spcAft>
+              <a:buSzPct val="100000"/>
+              <a:buChar char="•"/>
+              <a:lnSpc>
+                <a:spcPts val="2200"/>
+              </a:lnSpc>
+            </a:pPr>
+            <a:r>
+              <a:rPr sz="2000" b="0">
+                <a:solidFill>
+                  <a:srgbClr val="333333"/>
+                </a:solidFill>
+                <a:latin typeface="Calibri"/>
+              </a:rPr>
+              <a:t>Changing area when reshaping; ignoring aspect bounds; leaving hard modules soft by mistake</a:t>
             </a:r>
           </a:p>
         </p:txBody>

--- a/courses/learn_floorplanning/module03-03-soft-module-sizing/slides.pptx
+++ b/courses/learn_floorplanning/module03-03-soft-module-sizing/slides.pptx
@@ -15,6 +15,9 @@
     <p:sldId id="263" r:id="rId15"/>
     <p:sldId id="264" r:id="rId16"/>
     <p:sldId id="265" r:id="rId17"/>
+    <p:sldId id="266" r:id="rId18"/>
+    <p:sldId id="267" r:id="rId19"/>
+    <p:sldId id="268" r:id="rId20"/>
   </p:sldIdLst>
   <p:sldSz cx="12191695" cy="6858000" type="screen4x3"/>
   <p:notesSz cx="6858000" cy="9144000"/>
@@ -514,12 +517,6 @@
               <a:t>Soft module A keeps area six but may reshape between aspect one half and two. Reshape three by two into two by three, then pack legally—still area six.</a:t>
             </a:r>
           </a:p>
-          <a:p/>
-          <a:p>
-            <a:r>
-              <a:t>&lt;!-- algorithm-walkthrough --&gt;</a:t>
-            </a:r>
-          </a:p>
         </p:txBody>
       </p:sp>
       <p:sp>
@@ -587,6 +584,146 @@
           <a:lstStyle/>
           <a:p>
             <a:r>
+              <a:t>Implement resize_soft that preserves area, then pack. Assert soft A ends at two by three with area six and a legal outline fit.</a:t>
+            </a:r>
+          </a:p>
+        </p:txBody>
+      </p:sp>
+      <p:sp>
+        <p:nvSpPr>
+          <p:cNvPr id="4" name="Slide Number Placeholder 3"/>
+          <p:cNvSpPr>
+            <a:spLocks noGrp="1"/>
+          </p:cNvSpPr>
+          <p:nvPr>
+            <p:ph type="sldNum" idx="5" sz="quarter"/>
+          </p:nvPr>
+        </p:nvSpPr>
+        <p:spPr/>
+      </p:sp>
+    </p:spTree>
+  </p:cSld>
+  <p:clrMapOvr>
+    <a:masterClrMapping/>
+  </p:clrMapOvr>
+</p:notes>
+</file>
+
+<file path=ppt/notesSlides/notesSlide11.xml><?xml version="1.0" encoding="utf-8"?>
+<p:notes xmlns:a="http://schemas.openxmlformats.org/drawingml/2006/main" xmlns:p="http://schemas.openxmlformats.org/presentationml/2006/main" xmlns:r="http://schemas.openxmlformats.org/officeDocument/2006/relationships">
+  <p:cSld>
+    <p:spTree>
+      <p:nvGrpSpPr>
+        <p:cNvPr id="1" name=""/>
+        <p:cNvGrpSpPr/>
+        <p:nvPr/>
+      </p:nvGrpSpPr>
+      <p:grpSpPr>
+        <a:xfrm>
+          <a:off x="0" y="0"/>
+          <a:ext cx="0" cy="0"/>
+          <a:chOff x="0" y="0"/>
+          <a:chExt cx="0" cy="0"/>
+        </a:xfrm>
+      </p:grpSpPr>
+      <p:sp>
+        <p:nvSpPr>
+          <p:cNvPr id="2" name="Slide Image Placeholder 1"/>
+          <p:cNvSpPr>
+            <a:spLocks noGrp="1"/>
+          </p:cNvSpPr>
+          <p:nvPr>
+            <p:ph type="sldImg" idx="2"/>
+          </p:nvPr>
+        </p:nvSpPr>
+        <p:spPr/>
+      </p:sp>
+      <p:sp>
+        <p:nvSpPr>
+          <p:cNvPr id="3" name="Notes Placeholder 2"/>
+          <p:cNvSpPr>
+            <a:spLocks noGrp="1"/>
+          </p:cNvSpPr>
+          <p:nvPr>
+            <p:ph type="body" idx="3" sz="quarter"/>
+          </p:nvPr>
+        </p:nvSpPr>
+        <p:spPr/>
+        <p:txBody>
+          <a:bodyPr/>
+          <a:lstStyle/>
+          <a:p>
+            <a:r>
+              <a:t>Changing area when reshaping; ignoring aspect bounds; leaving hard modules soft by mistake.</a:t>
+            </a:r>
+          </a:p>
+        </p:txBody>
+      </p:sp>
+      <p:sp>
+        <p:nvSpPr>
+          <p:cNvPr id="4" name="Slide Number Placeholder 3"/>
+          <p:cNvSpPr>
+            <a:spLocks noGrp="1"/>
+          </p:cNvSpPr>
+          <p:nvPr>
+            <p:ph type="sldNum" idx="5" sz="quarter"/>
+          </p:nvPr>
+        </p:nvSpPr>
+        <p:spPr/>
+      </p:sp>
+    </p:spTree>
+  </p:cSld>
+  <p:clrMapOvr>
+    <a:masterClrMapping/>
+  </p:clrMapOvr>
+</p:notes>
+</file>
+
+<file path=ppt/notesSlides/notesSlide12.xml><?xml version="1.0" encoding="utf-8"?>
+<p:notes xmlns:a="http://schemas.openxmlformats.org/drawingml/2006/main" xmlns:p="http://schemas.openxmlformats.org/presentationml/2006/main" xmlns:r="http://schemas.openxmlformats.org/officeDocument/2006/relationships">
+  <p:cSld>
+    <p:spTree>
+      <p:nvGrpSpPr>
+        <p:cNvPr id="1" name=""/>
+        <p:cNvGrpSpPr/>
+        <p:nvPr/>
+      </p:nvGrpSpPr>
+      <p:grpSpPr>
+        <a:xfrm>
+          <a:off x="0" y="0"/>
+          <a:ext cx="0" cy="0"/>
+          <a:chOff x="0" y="0"/>
+          <a:chExt cx="0" cy="0"/>
+        </a:xfrm>
+      </p:grpSpPr>
+      <p:sp>
+        <p:nvSpPr>
+          <p:cNvPr id="2" name="Slide Image Placeholder 1"/>
+          <p:cNvSpPr>
+            <a:spLocks noGrp="1"/>
+          </p:cNvSpPr>
+          <p:nvPr>
+            <p:ph type="sldImg" idx="2"/>
+          </p:nvPr>
+        </p:nvSpPr>
+        <p:spPr/>
+      </p:sp>
+      <p:sp>
+        <p:nvSpPr>
+          <p:cNvPr id="3" name="Notes Placeholder 2"/>
+          <p:cNvSpPr>
+            <a:spLocks noGrp="1"/>
+          </p:cNvSpPr>
+          <p:nvPr>
+            <p:ph type="body" idx="3" sz="quarter"/>
+          </p:nvPr>
+        </p:nvSpPr>
+        <p:spPr/>
+        <p:txBody>
+          <a:bodyPr/>
+          <a:lstStyle/>
+          <a:p>
+            <a:r>
               <a:t>Accept a legal soft packing with A at two by three. Next: fix macro D at the origin.</a:t>
             </a:r>
           </a:p>
@@ -657,7 +794,13 @@
           <a:lstStyle/>
           <a:p>
             <a:r>
-              <a:t>Module A is soft: area stays six, but aspect can move between one half and two. Hard modules B through E keep fixed shapes.</a:t>
+              <a:t>Soft sizing picks width and height for A under a fixed area and aspect bounds, then re-packs the hard modules around it.</a:t>
+            </a:r>
+          </a:p>
+          <a:p/>
+          <a:p>
+            <a:r>
+              <a:t>Open this module's examples file and find the Pseudocode section. That written sketch is what you implement on the implement track and what the browser challenges measure.</a:t>
             </a:r>
           </a:p>
         </p:txBody>
@@ -727,7 +870,7 @@
           <a:lstStyle/>
           <a:p>
             <a:r>
-              <a:t>Reshape soft A to two by three—still area six. The soft packing moves neighbors so the outline stay legal.</a:t>
+              <a:t>Hard golden keeps A at three by two. Soft teaching pack uses two by three. Area stays six; deadspace shape changes.</a:t>
             </a:r>
           </a:p>
         </p:txBody>
@@ -797,7 +940,7 @@
           <a:lstStyle/>
           <a:p>
             <a:r>
-              <a:t>After reshape, the soft packing remains legal inside ten by eight. Softness is not a license to overflow—legality still gates acceptance.</a:t>
+              <a:t>Module A is soft: area stays six, but aspect can move between one half and two. Hard modules B through E keep fixed shapes.</a:t>
             </a:r>
           </a:p>
         </p:txBody>
@@ -867,7 +1010,7 @@
           <a:lstStyle/>
           <a:p>
             <a:r>
-              <a:t>Compare the hard three-by-two golden with the soft two-by-three packing. Same area budget for A; different whitespace shape.</a:t>
+              <a:t>Reshape soft A to two by three—still area six. The soft packing moves neighbors so the outline stay legal.</a:t>
             </a:r>
           </a:p>
         </p:txBody>
@@ -937,13 +1080,7 @@
           <a:lstStyle/>
           <a:p>
             <a:r>
-              <a:t>Soft modules trade aspect for packing quality under area and aspect bounds. Always re-check legality after a resize.</a:t>
-            </a:r>
-          </a:p>
-          <a:p/>
-          <a:p>
-            <a:r>
-              <a:t>&lt;!-- /algorithm-walkthrough --&gt;</a:t>
+              <a:t>After reshape, the soft packing remains legal inside ten by eight. Softness is not a license to overflow—legality still gates acceptance.</a:t>
             </a:r>
           </a:p>
         </p:txBody>
@@ -1013,7 +1150,7 @@
           <a:lstStyle/>
           <a:p>
             <a:r>
-              <a:t>Open soft-module-sizing. Show hard three-by-two, then Reshape A to two by three. Confirm area six and legality true on the soft packing.</a:t>
+              <a:t>Compare the hard three-by-two golden with the soft two-by-three packing. Same area budget for A; different whitespace shape.</a:t>
             </a:r>
           </a:p>
         </p:txBody>
@@ -1083,7 +1220,7 @@
           <a:lstStyle/>
           <a:p>
             <a:r>
-              <a:t>Implement resize_soft that preserves area, then pack. Assert soft A ends at two by three with area six and a legal outline fit.</a:t>
+              <a:t>Soft modules trade aspect for packing quality under area and aspect bounds. Always re-check legality after a resize.</a:t>
             </a:r>
           </a:p>
         </p:txBody>
@@ -1153,7 +1290,7 @@
           <a:lstStyle/>
           <a:p>
             <a:r>
-              <a:t>Changing area when reshaping; ignoring aspect bounds; leaving hard modules soft by mistake.</a:t>
+              <a:t>Open soft-module-sizing. Show hard three-by-two, then Reshape A to two by three. Confirm area six and legality true on the soft packing.</a:t>
             </a:r>
           </a:p>
         </p:txBody>
@@ -4311,6 +4448,495 @@
                 </a:solidFill>
                 <a:latin typeface="Calibri"/>
               </a:rPr>
+              <a:t>Browser lab track</a:t>
+            </a:r>
+          </a:p>
+        </p:txBody>
+      </p:sp>
+      <p:sp>
+        <p:nvSpPr>
+          <p:cNvPr id="3" name="TextBox 2"/>
+          <p:cNvSpPr txBox="1"/>
+          <p:nvPr/>
+        </p:nvSpPr>
+        <p:spPr>
+          <a:xfrm>
+            <a:off x="548640" y="1234440"/>
+            <a:ext cx="11064240" cy="4937760"/>
+          </a:xfrm>
+          <a:prstGeom prst="rect">
+            <a:avLst/>
+          </a:prstGeom>
+          <a:noFill/>
+        </p:spPr>
+        <p:txBody>
+          <a:bodyPr wrap="square">
+            <a:noAutofit/>
+          </a:bodyPr>
+          <a:lstStyle/>
+          <a:p>
+            <a:pPr lvl="0" marL="457200" indent="-228600">
+              <a:buFont typeface="Calibri"/>
+              <a:spcAft>
+                <a:spcPts val="1000"/>
+              </a:spcAft>
+              <a:buSzPct val="100000"/>
+              <a:buChar char="•"/>
+              <a:lnSpc>
+                <a:spcPts val="2200"/>
+              </a:lnSpc>
+            </a:pPr>
+            <a:r>
+              <a:rPr sz="2000" b="0">
+                <a:solidFill>
+                  <a:srgbClr val="333333"/>
+                </a:solidFill>
+                <a:latin typeface="Calibri"/>
+              </a:rPr>
+              <a:t>Open soft-module-sizing</a:t>
+            </a:r>
+          </a:p>
+          <a:p>
+            <a:pPr lvl="0" marL="457200" indent="-228600">
+              <a:buFont typeface="Calibri"/>
+              <a:spcAft>
+                <a:spcPts val="1000"/>
+              </a:spcAft>
+              <a:buSzPct val="100000"/>
+              <a:buChar char="•"/>
+              <a:lnSpc>
+                <a:spcPts val="2200"/>
+              </a:lnSpc>
+            </a:pPr>
+            <a:r>
+              <a:rPr sz="2000" b="0">
+                <a:solidFill>
+                  <a:srgbClr val="333333"/>
+                </a:solidFill>
+                <a:latin typeface="Calibri"/>
+              </a:rPr>
+              <a:t>Show hard three-by-two, then Reshape A to two by three</a:t>
+            </a:r>
+          </a:p>
+          <a:p>
+            <a:pPr lvl="0" marL="457200" indent="-228600">
+              <a:buFont typeface="Calibri"/>
+              <a:spcAft>
+                <a:spcPts val="1000"/>
+              </a:spcAft>
+              <a:buSzPct val="100000"/>
+              <a:buChar char="•"/>
+              <a:lnSpc>
+                <a:spcPts val="2200"/>
+              </a:lnSpc>
+            </a:pPr>
+            <a:r>
+              <a:rPr sz="2000" b="0">
+                <a:solidFill>
+                  <a:srgbClr val="333333"/>
+                </a:solidFill>
+                <a:latin typeface="Calibri"/>
+              </a:rPr>
+              <a:t>Confirm area six and legality true on the soft packing</a:t>
+            </a:r>
+          </a:p>
+        </p:txBody>
+      </p:sp>
+      <p:sp>
+        <p:nvSpPr>
+          <p:cNvPr id="4" name="TextBox 3"/>
+          <p:cNvSpPr txBox="1"/>
+          <p:nvPr/>
+        </p:nvSpPr>
+        <p:spPr>
+          <a:xfrm>
+            <a:off x="548640" y="6355080"/>
+            <a:ext cx="11064240" cy="320040"/>
+          </a:xfrm>
+          <a:prstGeom prst="rect">
+            <a:avLst/>
+          </a:prstGeom>
+          <a:noFill/>
+        </p:spPr>
+        <p:txBody>
+          <a:bodyPr wrap="square">
+            <a:noAutofit/>
+          </a:bodyPr>
+          <a:lstStyle/>
+          <a:p>
+            <a:pPr algn="r">
+              <a:lnSpc>
+                <a:spcPts val="2200"/>
+              </a:lnSpc>
+              <a:defRPr sz="1000" b="0">
+                <a:solidFill>
+                  <a:srgbClr val="666666"/>
+                </a:solidFill>
+                <a:latin typeface="Calibri"/>
+              </a:defRPr>
+            </a:pPr>
+            <a:r>
+              <a:t>learn_floorplanning — 03 soft module sizing</a:t>
+            </a:r>
+          </a:p>
+        </p:txBody>
+      </p:sp>
+    </p:spTree>
+  </p:cSld>
+  <p:clrMapOvr>
+    <a:masterClrMapping/>
+  </p:clrMapOvr>
+</p:sld>
+</file>
+
+<file path=ppt/slides/slide11.xml><?xml version="1.0" encoding="utf-8"?>
+<p:sld xmlns:a="http://schemas.openxmlformats.org/drawingml/2006/main" xmlns:p="http://schemas.openxmlformats.org/presentationml/2006/main" xmlns:r="http://schemas.openxmlformats.org/officeDocument/2006/relationships">
+  <p:cSld>
+    <p:spTree>
+      <p:nvGrpSpPr>
+        <p:cNvPr id="1" name=""/>
+        <p:cNvGrpSpPr/>
+        <p:nvPr/>
+      </p:nvGrpSpPr>
+      <p:grpSpPr/>
+      <p:sp>
+        <p:nvSpPr>
+          <p:cNvPr id="2" name="TextBox 1"/>
+          <p:cNvSpPr txBox="1"/>
+          <p:nvPr/>
+        </p:nvSpPr>
+        <p:spPr>
+          <a:xfrm>
+            <a:off x="548640" y="411480"/>
+            <a:ext cx="11064240" cy="777240"/>
+          </a:xfrm>
+          <a:prstGeom prst="rect">
+            <a:avLst/>
+          </a:prstGeom>
+          <a:noFill/>
+        </p:spPr>
+        <p:txBody>
+          <a:bodyPr wrap="square">
+            <a:noAutofit/>
+          </a:bodyPr>
+          <a:lstStyle/>
+          <a:p>
+            <a:pPr>
+              <a:lnSpc>
+                <a:spcPts val="2200"/>
+              </a:lnSpc>
+            </a:pPr>
+            <a:r>
+              <a:rPr sz="2800" b="1">
+                <a:solidFill>
+                  <a:srgbClr val="1A1A2E"/>
+                </a:solidFill>
+                <a:latin typeface="Calibri"/>
+              </a:rPr>
+              <a:t>Implement track</a:t>
+            </a:r>
+          </a:p>
+        </p:txBody>
+      </p:sp>
+      <p:sp>
+        <p:nvSpPr>
+          <p:cNvPr id="3" name="TextBox 2"/>
+          <p:cNvSpPr txBox="1"/>
+          <p:nvPr/>
+        </p:nvSpPr>
+        <p:spPr>
+          <a:xfrm>
+            <a:off x="548640" y="1234440"/>
+            <a:ext cx="11064240" cy="4937760"/>
+          </a:xfrm>
+          <a:prstGeom prst="rect">
+            <a:avLst/>
+          </a:prstGeom>
+          <a:noFill/>
+        </p:spPr>
+        <p:txBody>
+          <a:bodyPr wrap="square">
+            <a:noAutofit/>
+          </a:bodyPr>
+          <a:lstStyle/>
+          <a:p>
+            <a:pPr lvl="0" marL="457200" indent="-228600">
+              <a:buFont typeface="Calibri"/>
+              <a:spcAft>
+                <a:spcPts val="1000"/>
+              </a:spcAft>
+              <a:buSzPct val="100000"/>
+              <a:buChar char="•"/>
+              <a:lnSpc>
+                <a:spcPts val="2200"/>
+              </a:lnSpc>
+            </a:pPr>
+            <a:r>
+              <a:rPr sz="2000" b="0">
+                <a:solidFill>
+                  <a:srgbClr val="333333"/>
+                </a:solidFill>
+                <a:latin typeface="Calibri"/>
+              </a:rPr>
+              <a:t>Implement resize_soft that preserves area, then pack</a:t>
+            </a:r>
+          </a:p>
+          <a:p>
+            <a:pPr lvl="0" marL="457200" indent="-228600">
+              <a:buFont typeface="Calibri"/>
+              <a:spcAft>
+                <a:spcPts val="1000"/>
+              </a:spcAft>
+              <a:buSzPct val="100000"/>
+              <a:buChar char="•"/>
+              <a:lnSpc>
+                <a:spcPts val="2200"/>
+              </a:lnSpc>
+            </a:pPr>
+            <a:r>
+              <a:rPr sz="2000" b="0">
+                <a:solidFill>
+                  <a:srgbClr val="333333"/>
+                </a:solidFill>
+                <a:latin typeface="Calibri"/>
+              </a:rPr>
+              <a:t>Assert soft A ends at two by three with area six and a legal outline fit</a:t>
+            </a:r>
+          </a:p>
+        </p:txBody>
+      </p:sp>
+      <p:sp>
+        <p:nvSpPr>
+          <p:cNvPr id="4" name="TextBox 3"/>
+          <p:cNvSpPr txBox="1"/>
+          <p:nvPr/>
+        </p:nvSpPr>
+        <p:spPr>
+          <a:xfrm>
+            <a:off x="548640" y="6355080"/>
+            <a:ext cx="11064240" cy="320040"/>
+          </a:xfrm>
+          <a:prstGeom prst="rect">
+            <a:avLst/>
+          </a:prstGeom>
+          <a:noFill/>
+        </p:spPr>
+        <p:txBody>
+          <a:bodyPr wrap="square">
+            <a:noAutofit/>
+          </a:bodyPr>
+          <a:lstStyle/>
+          <a:p>
+            <a:pPr algn="r">
+              <a:lnSpc>
+                <a:spcPts val="2200"/>
+              </a:lnSpc>
+              <a:defRPr sz="1000" b="0">
+                <a:solidFill>
+                  <a:srgbClr val="666666"/>
+                </a:solidFill>
+                <a:latin typeface="Calibri"/>
+              </a:defRPr>
+            </a:pPr>
+            <a:r>
+              <a:t>learn_floorplanning — 03 soft module sizing</a:t>
+            </a:r>
+          </a:p>
+        </p:txBody>
+      </p:sp>
+    </p:spTree>
+  </p:cSld>
+  <p:clrMapOvr>
+    <a:masterClrMapping/>
+  </p:clrMapOvr>
+</p:sld>
+</file>
+
+<file path=ppt/slides/slide12.xml><?xml version="1.0" encoding="utf-8"?>
+<p:sld xmlns:a="http://schemas.openxmlformats.org/drawingml/2006/main" xmlns:p="http://schemas.openxmlformats.org/presentationml/2006/main" xmlns:r="http://schemas.openxmlformats.org/officeDocument/2006/relationships">
+  <p:cSld>
+    <p:spTree>
+      <p:nvGrpSpPr>
+        <p:cNvPr id="1" name=""/>
+        <p:cNvGrpSpPr/>
+        <p:nvPr/>
+      </p:nvGrpSpPr>
+      <p:grpSpPr/>
+      <p:sp>
+        <p:nvSpPr>
+          <p:cNvPr id="2" name="TextBox 1"/>
+          <p:cNvSpPr txBox="1"/>
+          <p:nvPr/>
+        </p:nvSpPr>
+        <p:spPr>
+          <a:xfrm>
+            <a:off x="548640" y="411480"/>
+            <a:ext cx="11064240" cy="777240"/>
+          </a:xfrm>
+          <a:prstGeom prst="rect">
+            <a:avLst/>
+          </a:prstGeom>
+          <a:noFill/>
+        </p:spPr>
+        <p:txBody>
+          <a:bodyPr wrap="square">
+            <a:noAutofit/>
+          </a:bodyPr>
+          <a:lstStyle/>
+          <a:p>
+            <a:pPr>
+              <a:lnSpc>
+                <a:spcPts val="2200"/>
+              </a:lnSpc>
+            </a:pPr>
+            <a:r>
+              <a:rPr sz="2800" b="1">
+                <a:solidFill>
+                  <a:srgbClr val="1A1A2E"/>
+                </a:solidFill>
+                <a:latin typeface="Calibri"/>
+              </a:rPr>
+              <a:t>Pitfalls</a:t>
+            </a:r>
+          </a:p>
+        </p:txBody>
+      </p:sp>
+      <p:sp>
+        <p:nvSpPr>
+          <p:cNvPr id="3" name="TextBox 2"/>
+          <p:cNvSpPr txBox="1"/>
+          <p:nvPr/>
+        </p:nvSpPr>
+        <p:spPr>
+          <a:xfrm>
+            <a:off x="548640" y="1234440"/>
+            <a:ext cx="11064240" cy="4937760"/>
+          </a:xfrm>
+          <a:prstGeom prst="rect">
+            <a:avLst/>
+          </a:prstGeom>
+          <a:noFill/>
+        </p:spPr>
+        <p:txBody>
+          <a:bodyPr wrap="square">
+            <a:noAutofit/>
+          </a:bodyPr>
+          <a:lstStyle/>
+          <a:p>
+            <a:pPr lvl="0" marL="457200" indent="-228600">
+              <a:buFont typeface="Calibri"/>
+              <a:spcAft>
+                <a:spcPts val="1000"/>
+              </a:spcAft>
+              <a:buSzPct val="100000"/>
+              <a:buChar char="•"/>
+              <a:lnSpc>
+                <a:spcPts val="2200"/>
+              </a:lnSpc>
+            </a:pPr>
+            <a:r>
+              <a:rPr sz="2000" b="0">
+                <a:solidFill>
+                  <a:srgbClr val="333333"/>
+                </a:solidFill>
+                <a:latin typeface="Calibri"/>
+              </a:rPr>
+              <a:t>Changing area when reshaping; ignoring aspect bounds; leaving hard modules soft by mistake</a:t>
+            </a:r>
+          </a:p>
+        </p:txBody>
+      </p:sp>
+      <p:sp>
+        <p:nvSpPr>
+          <p:cNvPr id="4" name="TextBox 3"/>
+          <p:cNvSpPr txBox="1"/>
+          <p:nvPr/>
+        </p:nvSpPr>
+        <p:spPr>
+          <a:xfrm>
+            <a:off x="548640" y="6355080"/>
+            <a:ext cx="11064240" cy="320040"/>
+          </a:xfrm>
+          <a:prstGeom prst="rect">
+            <a:avLst/>
+          </a:prstGeom>
+          <a:noFill/>
+        </p:spPr>
+        <p:txBody>
+          <a:bodyPr wrap="square">
+            <a:noAutofit/>
+          </a:bodyPr>
+          <a:lstStyle/>
+          <a:p>
+            <a:pPr algn="r">
+              <a:lnSpc>
+                <a:spcPts val="2200"/>
+              </a:lnSpc>
+              <a:defRPr sz="1000" b="0">
+                <a:solidFill>
+                  <a:srgbClr val="666666"/>
+                </a:solidFill>
+                <a:latin typeface="Calibri"/>
+              </a:defRPr>
+            </a:pPr>
+            <a:r>
+              <a:t>learn_floorplanning — 03 soft module sizing</a:t>
+            </a:r>
+          </a:p>
+        </p:txBody>
+      </p:sp>
+    </p:spTree>
+  </p:cSld>
+  <p:clrMapOvr>
+    <a:masterClrMapping/>
+  </p:clrMapOvr>
+</p:sld>
+</file>
+
+<file path=ppt/slides/slide13.xml><?xml version="1.0" encoding="utf-8"?>
+<p:sld xmlns:a="http://schemas.openxmlformats.org/drawingml/2006/main" xmlns:p="http://schemas.openxmlformats.org/presentationml/2006/main" xmlns:r="http://schemas.openxmlformats.org/officeDocument/2006/relationships">
+  <p:cSld>
+    <p:spTree>
+      <p:nvGrpSpPr>
+        <p:cNvPr id="1" name=""/>
+        <p:cNvGrpSpPr/>
+        <p:nvPr/>
+      </p:nvGrpSpPr>
+      <p:grpSpPr/>
+      <p:sp>
+        <p:nvSpPr>
+          <p:cNvPr id="2" name="TextBox 1"/>
+          <p:cNvSpPr txBox="1"/>
+          <p:nvPr/>
+        </p:nvSpPr>
+        <p:spPr>
+          <a:xfrm>
+            <a:off x="548640" y="411480"/>
+            <a:ext cx="11064240" cy="777240"/>
+          </a:xfrm>
+          <a:prstGeom prst="rect">
+            <a:avLst/>
+          </a:prstGeom>
+          <a:noFill/>
+        </p:spPr>
+        <p:txBody>
+          <a:bodyPr wrap="square">
+            <a:noAutofit/>
+          </a:bodyPr>
+          <a:lstStyle/>
+          <a:p>
+            <a:pPr>
+              <a:lnSpc>
+                <a:spcPts val="2200"/>
+              </a:lnSpc>
+            </a:pPr>
+            <a:r>
+              <a:rPr sz="2800" b="1">
+                <a:solidFill>
+                  <a:srgbClr val="1A1A2E"/>
+                </a:solidFill>
+                <a:latin typeface="Calibri"/>
+              </a:rPr>
               <a:t>Your turn</a:t>
             </a:r>
           </a:p>
@@ -4474,45 +5100,21 @@
                 </a:solidFill>
                 <a:latin typeface="Calibri"/>
               </a:rPr>
-              <a:t>A is soft with area 6</a:t>
-            </a:r>
-          </a:p>
-        </p:txBody>
-      </p:sp>
-      <p:pic>
-        <p:nvPicPr>
-          <p:cNvPr id="3" name="Picture 2" descr="01-soft-a.png"/>
-          <p:cNvPicPr>
-            <a:picLocks noChangeAspect="1"/>
-          </p:cNvPicPr>
-          <p:nvPr/>
-        </p:nvPicPr>
-        <p:blipFill>
-          <a:blip r:embed="rId2"/>
-          <a:stretch>
-            <a:fillRect/>
-          </a:stretch>
-        </p:blipFill>
-        <p:spPr>
-          <a:xfrm>
-            <a:off x="548640" y="1143000"/>
-            <a:ext cx="9424736" cy="4572000"/>
-          </a:xfrm>
-          <a:prstGeom prst="rect">
-            <a:avLst/>
-          </a:prstGeom>
-        </p:spPr>
-      </p:pic>
-      <p:sp>
-        <p:nvSpPr>
-          <p:cNvPr id="4" name="TextBox 3"/>
+              <a:t>Pseudocode</a:t>
+            </a:r>
+          </a:p>
+        </p:txBody>
+      </p:sp>
+      <p:sp>
+        <p:nvSpPr>
+          <p:cNvPr id="3" name="TextBox 2"/>
           <p:cNvSpPr txBox="1"/>
           <p:nvPr/>
         </p:nvSpPr>
         <p:spPr>
           <a:xfrm>
-            <a:off x="548640" y="5897880"/>
-            <a:ext cx="11064240" cy="411480"/>
+            <a:off x="548640" y="1234440"/>
+            <a:ext cx="11064240" cy="4937760"/>
           </a:xfrm>
           <a:prstGeom prst="rect">
             <a:avLst/>
@@ -4525,26 +5127,76 @@
           </a:bodyPr>
           <a:lstStyle/>
           <a:p>
-            <a:pPr>
+            <a:pPr lvl="0" marL="457200" indent="-228600">
+              <a:buFont typeface="Calibri"/>
+              <a:spcAft>
+                <a:spcPts val="1000"/>
+              </a:spcAft>
+              <a:buSzPct val="100000"/>
+              <a:buChar char="•"/>
               <a:lnSpc>
                 <a:spcPts val="2200"/>
               </a:lnSpc>
             </a:pPr>
             <a:r>
-              <a:rPr sz="1200" b="0">
+              <a:rPr sz="2000" b="0">
                 <a:solidFill>
                   <a:srgbClr val="333333"/>
                 </a:solidFill>
                 <a:latin typeface="Calibri"/>
               </a:rPr>
-              <a:t>A is soft with area 6</a:t>
-            </a:r>
-          </a:p>
-        </p:txBody>
-      </p:sp>
-      <p:sp>
-        <p:nvSpPr>
-          <p:cNvPr id="5" name="TextBox 4"/>
+              <a:t>Soft sizing picks width and height for A under a fixed area and aspect bounds</a:t>
+            </a:r>
+          </a:p>
+          <a:p>
+            <a:pPr lvl="0" marL="457200" indent="-228600">
+              <a:buFont typeface="Calibri"/>
+              <a:spcAft>
+                <a:spcPts val="1000"/>
+              </a:spcAft>
+              <a:buSzPct val="100000"/>
+              <a:buChar char="•"/>
+              <a:lnSpc>
+                <a:spcPts val="2200"/>
+              </a:lnSpc>
+            </a:pPr>
+            <a:r>
+              <a:rPr sz="2000" b="0">
+                <a:solidFill>
+                  <a:srgbClr val="333333"/>
+                </a:solidFill>
+                <a:latin typeface="Calibri"/>
+              </a:rPr>
+              <a:t>Open this module's examples file and find the Pseudocode section</a:t>
+            </a:r>
+          </a:p>
+          <a:p>
+            <a:pPr lvl="0" marL="457200" indent="-228600">
+              <a:buFont typeface="Calibri"/>
+              <a:spcAft>
+                <a:spcPts val="1000"/>
+              </a:spcAft>
+              <a:buSzPct val="100000"/>
+              <a:buChar char="•"/>
+              <a:lnSpc>
+                <a:spcPts val="2200"/>
+              </a:lnSpc>
+            </a:pPr>
+            <a:r>
+              <a:rPr sz="2000" b="0">
+                <a:solidFill>
+                  <a:srgbClr val="333333"/>
+                </a:solidFill>
+                <a:latin typeface="Calibri"/>
+              </a:rPr>
+              <a:t>That written sketch is what you implement on the implement track and what the browser</a:t>
+            </a:r>
+          </a:p>
+        </p:txBody>
+      </p:sp>
+      <p:sp>
+        <p:nvSpPr>
+          <p:cNvPr id="4" name="TextBox 3"/>
           <p:cNvSpPr txBox="1"/>
           <p:nvPr/>
         </p:nvSpPr>
@@ -4633,45 +5285,21 @@
                 </a:solidFill>
                 <a:latin typeface="Calibri"/>
               </a:rPr>
-              <a:t>Reshape A to 2×3</a:t>
-            </a:r>
-          </a:p>
-        </p:txBody>
-      </p:sp>
-      <p:pic>
-        <p:nvPicPr>
-          <p:cNvPr id="3" name="Picture 2" descr="02-reshape.png"/>
-          <p:cNvPicPr>
-            <a:picLocks noChangeAspect="1"/>
-          </p:cNvPicPr>
-          <p:nvPr/>
-        </p:nvPicPr>
-        <p:blipFill>
-          <a:blip r:embed="rId2"/>
-          <a:stretch>
-            <a:fillRect/>
-          </a:stretch>
-        </p:blipFill>
-        <p:spPr>
-          <a:xfrm>
-            <a:off x="548640" y="1143000"/>
-            <a:ext cx="9424736" cy="4572000"/>
-          </a:xfrm>
-          <a:prstGeom prst="rect">
-            <a:avLst/>
-          </a:prstGeom>
-        </p:spPr>
-      </p:pic>
-      <p:sp>
-        <p:nvSpPr>
-          <p:cNvPr id="4" name="TextBox 3"/>
+              <a:t>Algorithm sketch</a:t>
+            </a:r>
+          </a:p>
+        </p:txBody>
+      </p:sp>
+      <p:sp>
+        <p:nvSpPr>
+          <p:cNvPr id="3" name="TextBox 2"/>
           <p:cNvSpPr txBox="1"/>
           <p:nvPr/>
         </p:nvSpPr>
         <p:spPr>
           <a:xfrm>
-            <a:off x="548640" y="5897880"/>
-            <a:ext cx="11064240" cy="411480"/>
+            <a:off x="548640" y="1234440"/>
+            <a:ext cx="11064240" cy="4937760"/>
           </a:xfrm>
           <a:prstGeom prst="rect">
             <a:avLst/>
@@ -4684,26 +5312,76 @@
           </a:bodyPr>
           <a:lstStyle/>
           <a:p>
-            <a:pPr>
+            <a:pPr lvl="0" marL="457200" indent="-228600">
+              <a:buFont typeface="Calibri"/>
+              <a:spcAft>
+                <a:spcPts val="1000"/>
+              </a:spcAft>
+              <a:buSzPct val="100000"/>
+              <a:buChar char="•"/>
               <a:lnSpc>
                 <a:spcPts val="2200"/>
               </a:lnSpc>
             </a:pPr>
             <a:r>
-              <a:rPr sz="1200" b="0">
+              <a:rPr sz="2000" b="0">
                 <a:solidFill>
                   <a:srgbClr val="333333"/>
                 </a:solidFill>
                 <a:latin typeface="Calibri"/>
               </a:rPr>
-              <a:t>Reshape A to 2×3</a:t>
-            </a:r>
-          </a:p>
-        </p:txBody>
-      </p:sp>
-      <p:sp>
-        <p:nvSpPr>
-          <p:cNvPr id="5" name="TextBox 4"/>
+              <a:t>Hard golden keeps A at three by two</a:t>
+            </a:r>
+          </a:p>
+          <a:p>
+            <a:pPr lvl="0" marL="457200" indent="-228600">
+              <a:buFont typeface="Calibri"/>
+              <a:spcAft>
+                <a:spcPts val="1000"/>
+              </a:spcAft>
+              <a:buSzPct val="100000"/>
+              <a:buChar char="•"/>
+              <a:lnSpc>
+                <a:spcPts val="2200"/>
+              </a:lnSpc>
+            </a:pPr>
+            <a:r>
+              <a:rPr sz="2000" b="0">
+                <a:solidFill>
+                  <a:srgbClr val="333333"/>
+                </a:solidFill>
+                <a:latin typeface="Calibri"/>
+              </a:rPr>
+              <a:t>Soft teaching pack uses two by three</a:t>
+            </a:r>
+          </a:p>
+          <a:p>
+            <a:pPr lvl="0" marL="457200" indent="-228600">
+              <a:buFont typeface="Calibri"/>
+              <a:spcAft>
+                <a:spcPts val="1000"/>
+              </a:spcAft>
+              <a:buSzPct val="100000"/>
+              <a:buChar char="•"/>
+              <a:lnSpc>
+                <a:spcPts val="2200"/>
+              </a:lnSpc>
+            </a:pPr>
+            <a:r>
+              <a:rPr sz="2000" b="0">
+                <a:solidFill>
+                  <a:srgbClr val="333333"/>
+                </a:solidFill>
+                <a:latin typeface="Calibri"/>
+              </a:rPr>
+              <a:t>Area stays six; deadspace shape changes</a:t>
+            </a:r>
+          </a:p>
+        </p:txBody>
+      </p:sp>
+      <p:sp>
+        <p:nvSpPr>
+          <p:cNvPr id="4" name="TextBox 3"/>
           <p:cNvSpPr txBox="1"/>
           <p:nvPr/>
         </p:nvSpPr>
@@ -4792,50 +5470,28 @@
                 </a:solidFill>
                 <a:latin typeface="Calibri"/>
               </a:rPr>
-              <a:t>Soft packing stays legal</a:t>
-            </a:r>
-          </a:p>
-        </p:txBody>
-      </p:sp>
-      <p:pic>
-        <p:nvPicPr>
-          <p:cNvPr id="3" name="Picture 2" descr="03-legal.png"/>
-          <p:cNvPicPr>
-            <a:picLocks noChangeAspect="1"/>
-          </p:cNvPicPr>
+              <a:t>Algorithm sketch — try these</a:t>
+            </a:r>
+          </a:p>
+        </p:txBody>
+      </p:sp>
+      <p:sp>
+        <p:nvSpPr>
+          <p:cNvPr id="3" name="TextBox 2"/>
+          <p:cNvSpPr txBox="1"/>
           <p:nvPr/>
-        </p:nvPicPr>
-        <p:blipFill>
-          <a:blip r:embed="rId2"/>
-          <a:stretch>
-            <a:fillRect/>
-          </a:stretch>
-        </p:blipFill>
+        </p:nvSpPr>
         <p:spPr>
           <a:xfrm>
             <a:off x="548640" y="1143000"/>
-            <a:ext cx="9424736" cy="4572000"/>
+            <a:ext cx="11064240" cy="5029200"/>
           </a:xfrm>
           <a:prstGeom prst="rect">
             <a:avLst/>
           </a:prstGeom>
-        </p:spPr>
-      </p:pic>
-      <p:sp>
-        <p:nvSpPr>
-          <p:cNvPr id="4" name="TextBox 3"/>
-          <p:cNvSpPr txBox="1"/>
-          <p:nvPr/>
-        </p:nvSpPr>
-        <p:spPr>
-          <a:xfrm>
-            <a:off x="548640" y="5897880"/>
-            <a:ext cx="11064240" cy="411480"/>
-          </a:xfrm>
-          <a:prstGeom prst="rect">
-            <a:avLst/>
-          </a:prstGeom>
-          <a:noFill/>
+          <a:solidFill>
+            <a:srgbClr val="F4F4F4"/>
+          </a:solidFill>
         </p:spPr>
         <p:txBody>
           <a:bodyPr wrap="square">
@@ -4847,22 +5503,120 @@
               <a:lnSpc>
                 <a:spcPts val="2200"/>
               </a:lnSpc>
+              <a:spcAft>
+                <a:spcPts val="400"/>
+              </a:spcAft>
             </a:pPr>
             <a:r>
-              <a:rPr sz="1200" b="0">
+              <a:rPr sz="2000" b="0">
                 <a:solidFill>
                   <a:srgbClr val="333333"/>
                 </a:solidFill>
-                <a:latin typeface="Calibri"/>
+                <a:latin typeface="Consolas"/>
               </a:rPr>
-              <a:t>Soft packing stays legal</a:t>
-            </a:r>
-          </a:p>
-        </p:txBody>
-      </p:sp>
-      <p:sp>
-        <p:nvSpPr>
-          <p:cNvPr id="5" name="TextBox 4"/>
+              <a:t>INPUT: soft A area=6, aspect∈[0.5,2]</a:t>
+            </a:r>
+          </a:p>
+          <a:p>
+            <a:pPr>
+              <a:lnSpc>
+                <a:spcPts val="2200"/>
+              </a:lnSpc>
+              <a:spcAft>
+                <a:spcPts val="400"/>
+              </a:spcAft>
+            </a:pPr>
+            <a:r>
+              <a:rPr sz="2000" b="0">
+                <a:solidFill>
+                  <a:srgbClr val="333333"/>
+                </a:solidFill>
+                <a:latin typeface="Consolas"/>
+              </a:rPr>
+              <a:t>OUTPUT: (w,h) with w·h=area; pack rest</a:t>
+            </a:r>
+          </a:p>
+          <a:p>
+            <a:pPr>
+              <a:lnSpc>
+                <a:spcPts val="2200"/>
+              </a:lnSpc>
+              <a:spcAft>
+                <a:spcPts val="400"/>
+              </a:spcAft>
+            </a:pPr>
+            <a:r>
+              <a:rPr sz="2000" b="0">
+                <a:solidFill>
+                  <a:srgbClr val="333333"/>
+                </a:solidFill>
+                <a:latin typeface="Consolas"/>
+              </a:rPr>
+              <a:t>choose aspect; set w,h; re-pack / legalize</a:t>
+            </a:r>
+          </a:p>
+          <a:p>
+            <a:pPr>
+              <a:lnSpc>
+                <a:spcPts val="2200"/>
+              </a:lnSpc>
+              <a:spcAft>
+                <a:spcPts val="400"/>
+              </a:spcAft>
+            </a:pPr>
+            <a:r>
+              <a:rPr sz="2000" b="0">
+                <a:solidFill>
+                  <a:srgbClr val="333333"/>
+                </a:solidFill>
+                <a:latin typeface="Consolas"/>
+              </a:rPr>
+              <a:t>hard modules keep fixed w×h</a:t>
+            </a:r>
+          </a:p>
+          <a:p>
+            <a:pPr>
+              <a:lnSpc>
+                <a:spcPts val="2200"/>
+              </a:lnSpc>
+              <a:spcAft>
+                <a:spcPts val="400"/>
+              </a:spcAft>
+            </a:pPr>
+            <a:r>
+              <a:rPr sz="2000" b="0">
+                <a:solidFill>
+                  <a:srgbClr val="333333"/>
+                </a:solidFill>
+                <a:latin typeface="Consolas"/>
+              </a:rPr>
+              <a:t>GOLDEN hard A 3×2 vs soft A 2×3 pack</a:t>
+            </a:r>
+          </a:p>
+          <a:p>
+            <a:pPr>
+              <a:lnSpc>
+                <a:spcPts val="2200"/>
+              </a:lnSpc>
+              <a:spcAft>
+                <a:spcPts val="400"/>
+              </a:spcAft>
+            </a:pPr>
+            <a:r>
+              <a:rPr sz="2000" b="0">
+                <a:solidFill>
+                  <a:srgbClr val="333333"/>
+                </a:solidFill>
+                <a:latin typeface="Consolas"/>
+              </a:rPr>
+              <a:t>both area 6; whitespace shape differs</a:t>
+            </a:r>
+          </a:p>
+        </p:txBody>
+      </p:sp>
+      <p:sp>
+        <p:nvSpPr>
+          <p:cNvPr id="4" name="TextBox 3"/>
           <p:cNvSpPr txBox="1"/>
           <p:nvPr/>
         </p:nvSpPr>
@@ -4951,14 +5705,14 @@
                 </a:solidFill>
                 <a:latin typeface="Calibri"/>
               </a:rPr>
-              <a:t>Hard vs soft views</a:t>
+              <a:t>A is soft with area 6</a:t>
             </a:r>
           </a:p>
         </p:txBody>
       </p:sp>
       <p:pic>
         <p:nvPicPr>
-          <p:cNvPr id="3" name="Picture 2" descr="04-compare.png"/>
+          <p:cNvPr id="3" name="Picture 2" descr="01-soft-a.png"/>
           <p:cNvPicPr>
             <a:picLocks noChangeAspect="1"/>
           </p:cNvPicPr>
@@ -5014,7 +5768,7 @@
                 </a:solidFill>
                 <a:latin typeface="Calibri"/>
               </a:rPr>
-              <a:t>Hard vs soft views</a:t>
+              <a:t>A is soft with area 6</a:t>
             </a:r>
           </a:p>
         </p:txBody>
@@ -5110,14 +5864,14 @@
                 </a:solidFill>
                 <a:latin typeface="Calibri"/>
               </a:rPr>
-              <a:t>Softness is constrained freedom</a:t>
+              <a:t>Reshape A to 2×3</a:t>
             </a:r>
           </a:p>
         </p:txBody>
       </p:sp>
       <p:pic>
         <p:nvPicPr>
-          <p:cNvPr id="3" name="Picture 2" descr="05-takeaway.png"/>
+          <p:cNvPr id="3" name="Picture 2" descr="02-reshape.png"/>
           <p:cNvPicPr>
             <a:picLocks noChangeAspect="1"/>
           </p:cNvPicPr>
@@ -5173,7 +5927,7 @@
                 </a:solidFill>
                 <a:latin typeface="Calibri"/>
               </a:rPr>
-              <a:t>Softness is constrained freedom</a:t>
+              <a:t>Reshape A to 2×3</a:t>
             </a:r>
           </a:p>
         </p:txBody>
@@ -5269,21 +6023,45 @@
                 </a:solidFill>
                 <a:latin typeface="Calibri"/>
               </a:rPr>
-              <a:t>Browser lab track</a:t>
-            </a:r>
-          </a:p>
-        </p:txBody>
-      </p:sp>
-      <p:sp>
-        <p:nvSpPr>
-          <p:cNvPr id="3" name="TextBox 2"/>
+              <a:t>Soft packing stays legal</a:t>
+            </a:r>
+          </a:p>
+        </p:txBody>
+      </p:sp>
+      <p:pic>
+        <p:nvPicPr>
+          <p:cNvPr id="3" name="Picture 2" descr="03-legal.png"/>
+          <p:cNvPicPr>
+            <a:picLocks noChangeAspect="1"/>
+          </p:cNvPicPr>
+          <p:nvPr/>
+        </p:nvPicPr>
+        <p:blipFill>
+          <a:blip r:embed="rId2"/>
+          <a:stretch>
+            <a:fillRect/>
+          </a:stretch>
+        </p:blipFill>
+        <p:spPr>
+          <a:xfrm>
+            <a:off x="548640" y="1143000"/>
+            <a:ext cx="9424736" cy="4572000"/>
+          </a:xfrm>
+          <a:prstGeom prst="rect">
+            <a:avLst/>
+          </a:prstGeom>
+        </p:spPr>
+      </p:pic>
+      <p:sp>
+        <p:nvSpPr>
+          <p:cNvPr id="4" name="TextBox 3"/>
           <p:cNvSpPr txBox="1"/>
           <p:nvPr/>
         </p:nvSpPr>
         <p:spPr>
           <a:xfrm>
-            <a:off x="548640" y="1234440"/>
-            <a:ext cx="11064240" cy="4937760"/>
+            <a:off x="548640" y="5897880"/>
+            <a:ext cx="11064240" cy="411480"/>
           </a:xfrm>
           <a:prstGeom prst="rect">
             <a:avLst/>
@@ -5296,76 +6074,26 @@
           </a:bodyPr>
           <a:lstStyle/>
           <a:p>
-            <a:pPr lvl="0" marL="457200" indent="-228600">
-              <a:buFont typeface="Calibri"/>
-              <a:spcAft>
-                <a:spcPts val="1000"/>
-              </a:spcAft>
-              <a:buSzPct val="100000"/>
-              <a:buChar char="•"/>
+            <a:pPr>
               <a:lnSpc>
                 <a:spcPts val="2200"/>
               </a:lnSpc>
             </a:pPr>
             <a:r>
-              <a:rPr sz="2000" b="0">
+              <a:rPr sz="1200" b="0">
                 <a:solidFill>
                   <a:srgbClr val="333333"/>
                 </a:solidFill>
                 <a:latin typeface="Calibri"/>
               </a:rPr>
-              <a:t>Open soft-module-sizing</a:t>
-            </a:r>
-          </a:p>
-          <a:p>
-            <a:pPr lvl="0" marL="457200" indent="-228600">
-              <a:buFont typeface="Calibri"/>
-              <a:spcAft>
-                <a:spcPts val="1000"/>
-              </a:spcAft>
-              <a:buSzPct val="100000"/>
-              <a:buChar char="•"/>
-              <a:lnSpc>
-                <a:spcPts val="2200"/>
-              </a:lnSpc>
-            </a:pPr>
-            <a:r>
-              <a:rPr sz="2000" b="0">
-                <a:solidFill>
-                  <a:srgbClr val="333333"/>
-                </a:solidFill>
-                <a:latin typeface="Calibri"/>
-              </a:rPr>
-              <a:t>Show hard three-by-two, then Reshape A to two by three</a:t>
-            </a:r>
-          </a:p>
-          <a:p>
-            <a:pPr lvl="0" marL="457200" indent="-228600">
-              <a:buFont typeface="Calibri"/>
-              <a:spcAft>
-                <a:spcPts val="1000"/>
-              </a:spcAft>
-              <a:buSzPct val="100000"/>
-              <a:buChar char="•"/>
-              <a:lnSpc>
-                <a:spcPts val="2200"/>
-              </a:lnSpc>
-            </a:pPr>
-            <a:r>
-              <a:rPr sz="2000" b="0">
-                <a:solidFill>
-                  <a:srgbClr val="333333"/>
-                </a:solidFill>
-                <a:latin typeface="Calibri"/>
-              </a:rPr>
-              <a:t>Confirm area six and legality true on the soft packing</a:t>
-            </a:r>
-          </a:p>
-        </p:txBody>
-      </p:sp>
-      <p:sp>
-        <p:nvSpPr>
-          <p:cNvPr id="4" name="TextBox 3"/>
+              <a:t>Soft packing stays legal</a:t>
+            </a:r>
+          </a:p>
+        </p:txBody>
+      </p:sp>
+      <p:sp>
+        <p:nvSpPr>
+          <p:cNvPr id="5" name="TextBox 4"/>
           <p:cNvSpPr txBox="1"/>
           <p:nvPr/>
         </p:nvSpPr>
@@ -5454,21 +6182,45 @@
                 </a:solidFill>
                 <a:latin typeface="Calibri"/>
               </a:rPr>
-              <a:t>Implement track</a:t>
-            </a:r>
-          </a:p>
-        </p:txBody>
-      </p:sp>
-      <p:sp>
-        <p:nvSpPr>
-          <p:cNvPr id="3" name="TextBox 2"/>
+              <a:t>Hard vs soft views</a:t>
+            </a:r>
+          </a:p>
+        </p:txBody>
+      </p:sp>
+      <p:pic>
+        <p:nvPicPr>
+          <p:cNvPr id="3" name="Picture 2" descr="04-compare.png"/>
+          <p:cNvPicPr>
+            <a:picLocks noChangeAspect="1"/>
+          </p:cNvPicPr>
+          <p:nvPr/>
+        </p:nvPicPr>
+        <p:blipFill>
+          <a:blip r:embed="rId2"/>
+          <a:stretch>
+            <a:fillRect/>
+          </a:stretch>
+        </p:blipFill>
+        <p:spPr>
+          <a:xfrm>
+            <a:off x="548640" y="1143000"/>
+            <a:ext cx="9424736" cy="4572000"/>
+          </a:xfrm>
+          <a:prstGeom prst="rect">
+            <a:avLst/>
+          </a:prstGeom>
+        </p:spPr>
+      </p:pic>
+      <p:sp>
+        <p:nvSpPr>
+          <p:cNvPr id="4" name="TextBox 3"/>
           <p:cNvSpPr txBox="1"/>
           <p:nvPr/>
         </p:nvSpPr>
         <p:spPr>
           <a:xfrm>
-            <a:off x="548640" y="1234440"/>
-            <a:ext cx="11064240" cy="4937760"/>
+            <a:off x="548640" y="5897880"/>
+            <a:ext cx="11064240" cy="411480"/>
           </a:xfrm>
           <a:prstGeom prst="rect">
             <a:avLst/>
@@ -5481,54 +6233,26 @@
           </a:bodyPr>
           <a:lstStyle/>
           <a:p>
-            <a:pPr lvl="0" marL="457200" indent="-228600">
-              <a:buFont typeface="Calibri"/>
-              <a:spcAft>
-                <a:spcPts val="1000"/>
-              </a:spcAft>
-              <a:buSzPct val="100000"/>
-              <a:buChar char="•"/>
+            <a:pPr>
               <a:lnSpc>
                 <a:spcPts val="2200"/>
               </a:lnSpc>
             </a:pPr>
             <a:r>
-              <a:rPr sz="2000" b="0">
+              <a:rPr sz="1200" b="0">
                 <a:solidFill>
                   <a:srgbClr val="333333"/>
                 </a:solidFill>
                 <a:latin typeface="Calibri"/>
               </a:rPr>
-              <a:t>Implement resize_soft that preserves area, then pack</a:t>
-            </a:r>
-          </a:p>
-          <a:p>
-            <a:pPr lvl="0" marL="457200" indent="-228600">
-              <a:buFont typeface="Calibri"/>
-              <a:spcAft>
-                <a:spcPts val="1000"/>
-              </a:spcAft>
-              <a:buSzPct val="100000"/>
-              <a:buChar char="•"/>
-              <a:lnSpc>
-                <a:spcPts val="2200"/>
-              </a:lnSpc>
-            </a:pPr>
-            <a:r>
-              <a:rPr sz="2000" b="0">
-                <a:solidFill>
-                  <a:srgbClr val="333333"/>
-                </a:solidFill>
-                <a:latin typeface="Calibri"/>
-              </a:rPr>
-              <a:t>Assert soft A ends at two by three with area six and a legal outline fit</a:t>
-            </a:r>
-          </a:p>
-        </p:txBody>
-      </p:sp>
-      <p:sp>
-        <p:nvSpPr>
-          <p:cNvPr id="4" name="TextBox 3"/>
+              <a:t>Hard vs soft views</a:t>
+            </a:r>
+          </a:p>
+        </p:txBody>
+      </p:sp>
+      <p:sp>
+        <p:nvSpPr>
+          <p:cNvPr id="5" name="TextBox 4"/>
           <p:cNvSpPr txBox="1"/>
           <p:nvPr/>
         </p:nvSpPr>
@@ -5617,21 +6341,45 @@
                 </a:solidFill>
                 <a:latin typeface="Calibri"/>
               </a:rPr>
-              <a:t>Pitfalls</a:t>
-            </a:r>
-          </a:p>
-        </p:txBody>
-      </p:sp>
-      <p:sp>
-        <p:nvSpPr>
-          <p:cNvPr id="3" name="TextBox 2"/>
+              <a:t>Softness is constrained freedom</a:t>
+            </a:r>
+          </a:p>
+        </p:txBody>
+      </p:sp>
+      <p:pic>
+        <p:nvPicPr>
+          <p:cNvPr id="3" name="Picture 2" descr="05-takeaway.png"/>
+          <p:cNvPicPr>
+            <a:picLocks noChangeAspect="1"/>
+          </p:cNvPicPr>
+          <p:nvPr/>
+        </p:nvPicPr>
+        <p:blipFill>
+          <a:blip r:embed="rId2"/>
+          <a:stretch>
+            <a:fillRect/>
+          </a:stretch>
+        </p:blipFill>
+        <p:spPr>
+          <a:xfrm>
+            <a:off x="548640" y="1143000"/>
+            <a:ext cx="9424736" cy="4572000"/>
+          </a:xfrm>
+          <a:prstGeom prst="rect">
+            <a:avLst/>
+          </a:prstGeom>
+        </p:spPr>
+      </p:pic>
+      <p:sp>
+        <p:nvSpPr>
+          <p:cNvPr id="4" name="TextBox 3"/>
           <p:cNvSpPr txBox="1"/>
           <p:nvPr/>
         </p:nvSpPr>
         <p:spPr>
           <a:xfrm>
-            <a:off x="548640" y="1234440"/>
-            <a:ext cx="11064240" cy="4937760"/>
+            <a:off x="548640" y="5897880"/>
+            <a:ext cx="11064240" cy="411480"/>
           </a:xfrm>
           <a:prstGeom prst="rect">
             <a:avLst/>
@@ -5644,32 +6392,26 @@
           </a:bodyPr>
           <a:lstStyle/>
           <a:p>
-            <a:pPr lvl="0" marL="457200" indent="-228600">
-              <a:buFont typeface="Calibri"/>
-              <a:spcAft>
-                <a:spcPts val="1000"/>
-              </a:spcAft>
-              <a:buSzPct val="100000"/>
-              <a:buChar char="•"/>
+            <a:pPr>
               <a:lnSpc>
                 <a:spcPts val="2200"/>
               </a:lnSpc>
             </a:pPr>
             <a:r>
-              <a:rPr sz="2000" b="0">
+              <a:rPr sz="1200" b="0">
                 <a:solidFill>
                   <a:srgbClr val="333333"/>
                 </a:solidFill>
                 <a:latin typeface="Calibri"/>
               </a:rPr>
-              <a:t>Changing area when reshaping; ignoring aspect bounds; leaving hard modules soft by mistake</a:t>
-            </a:r>
-          </a:p>
-        </p:txBody>
-      </p:sp>
-      <p:sp>
-        <p:nvSpPr>
-          <p:cNvPr id="4" name="TextBox 3"/>
+              <a:t>Softness is constrained freedom</a:t>
+            </a:r>
+          </a:p>
+        </p:txBody>
+      </p:sp>
+      <p:sp>
+        <p:nvSpPr>
+          <p:cNvPr id="5" name="TextBox 4"/>
           <p:cNvSpPr txBox="1"/>
           <p:nvPr/>
         </p:nvSpPr>
